--- a/curso/pptx/S25.pptx
+++ b/curso/pptx/S25.pptx
@@ -3890,8 +3890,8 @@
         </p:nvSpPr>
         <p:spPr>
           <a:xfrm>
-            <a:off x="640000" y="420000"/>
-            <a:ext cx="10912000" cy="420000"/>
+            <a:off x="10652000" y="380000"/>
+            <a:ext cx="900000" cy="800000"/>
           </a:xfrm>
           <a:prstGeom prst="rect">
             <a:avLst/>
@@ -3906,17 +3906,17 @@
           <a:p>
             <a:pPr>
               <a:spcAft>
-                <a:spcPts val="810"/>
+                <a:spcPts val="1980"/>
               </a:spcAft>
             </a:pPr>
             <a:r>
-              <a:rPr sz="1800" b="1">
+              <a:rPr sz="4400" b="0">
                 <a:solidFill>
                   <a:srgbClr val="1F2A44"/>
                 </a:solidFill>
                 <a:latin typeface="Nunito Sans"/>
               </a:rPr>
-              <a:t>🦉 Aula de Filosofía</a:t>
+              <a:t>🙃</a:t>
             </a:r>
           </a:p>
         </p:txBody>

--- a/curso/pptx/S25.pptx
+++ b/curso/pptx/S25.pptx
@@ -471,426 +471,6 @@
     </a:lvl9pPr>
   </p:notesStyle>
 </p:notesMaster>
-</file>
-
-<file path=ppt/notesSlides/notesSlide1.xml><?xml version="1.0" encoding="utf-8"?>
-<p:notes xmlns:a="http://schemas.openxmlformats.org/drawingml/2006/main" xmlns:p="http://schemas.openxmlformats.org/presentationml/2006/main" xmlns:r="http://schemas.openxmlformats.org/officeDocument/2006/relationships">
-  <p:cSld>
-    <p:spTree>
-      <p:nvGrpSpPr>
-        <p:cNvPr id="1" name=""/>
-        <p:cNvGrpSpPr/>
-        <p:nvPr/>
-      </p:nvGrpSpPr>
-      <p:grpSpPr>
-        <a:xfrm>
-          <a:off x="0" y="0"/>
-          <a:ext cx="0" cy="0"/>
-          <a:chOff x="0" y="0"/>
-          <a:chExt cx="0" cy="0"/>
-        </a:xfrm>
-      </p:grpSpPr>
-      <p:sp>
-        <p:nvSpPr>
-          <p:cNvPr id="2" name="Slide Image Placeholder 1"/>
-          <p:cNvSpPr>
-            <a:spLocks noGrp="1"/>
-          </p:cNvSpPr>
-          <p:nvPr>
-            <p:ph type="sldImg" idx="2"/>
-          </p:nvPr>
-        </p:nvSpPr>
-        <p:spPr/>
-      </p:sp>
-      <p:sp>
-        <p:nvSpPr>
-          <p:cNvPr id="3" name="Notes Placeholder 2"/>
-          <p:cNvSpPr>
-            <a:spLocks noGrp="1"/>
-          </p:cNvSpPr>
-          <p:nvPr>
-            <p:ph type="body" idx="3" sz="quarter"/>
-          </p:nvPr>
-        </p:nvSpPr>
-        <p:spPr/>
-        <p:txBody>
-          <a:bodyPr/>
-          <a:lstStyle/>
-          <a:p>
-            <a:r>
-              <a:t>3 minutos. Sin apuntes. Es para recordar, no cuenta para nota.</a:t>
-            </a:r>
-          </a:p>
-        </p:txBody>
-      </p:sp>
-      <p:sp>
-        <p:nvSpPr>
-          <p:cNvPr id="4" name="Slide Number Placeholder 3"/>
-          <p:cNvSpPr>
-            <a:spLocks noGrp="1"/>
-          </p:cNvSpPr>
-          <p:nvPr>
-            <p:ph type="sldNum" idx="5" sz="quarter"/>
-          </p:nvPr>
-        </p:nvSpPr>
-        <p:spPr/>
-      </p:sp>
-    </p:spTree>
-  </p:cSld>
-  <p:clrMapOvr>
-    <a:masterClrMapping/>
-  </p:clrMapOvr>
-</p:notes>
-</file>
-
-<file path=ppt/notesSlides/notesSlide2.xml><?xml version="1.0" encoding="utf-8"?>
-<p:notes xmlns:a="http://schemas.openxmlformats.org/drawingml/2006/main" xmlns:p="http://schemas.openxmlformats.org/presentationml/2006/main" xmlns:r="http://schemas.openxmlformats.org/officeDocument/2006/relationships">
-  <p:cSld>
-    <p:spTree>
-      <p:nvGrpSpPr>
-        <p:cNvPr id="1" name=""/>
-        <p:cNvGrpSpPr/>
-        <p:nvPr/>
-      </p:nvGrpSpPr>
-      <p:grpSpPr>
-        <a:xfrm>
-          <a:off x="0" y="0"/>
-          <a:ext cx="0" cy="0"/>
-          <a:chOff x="0" y="0"/>
-          <a:chExt cx="0" cy="0"/>
-        </a:xfrm>
-      </p:grpSpPr>
-      <p:sp>
-        <p:nvSpPr>
-          <p:cNvPr id="2" name="Slide Image Placeholder 1"/>
-          <p:cNvSpPr>
-            <a:spLocks noGrp="1"/>
-          </p:cNvSpPr>
-          <p:nvPr>
-            <p:ph type="sldImg" idx="2"/>
-          </p:nvPr>
-        </p:nvSpPr>
-        <p:spPr/>
-      </p:sp>
-      <p:sp>
-        <p:nvSpPr>
-          <p:cNvPr id="3" name="Notes Placeholder 2"/>
-          <p:cNvSpPr>
-            <a:spLocks noGrp="1"/>
-          </p:cNvSpPr>
-          <p:nvPr>
-            <p:ph type="body" idx="3" sz="quarter"/>
-          </p:nvPr>
-        </p:nvSpPr>
-        <p:spPr/>
-        <p:txBody>
-          <a:bodyPr/>
-          <a:lstStyle/>
-          <a:p>
-            <a:r>
-              <a:t>3 minutos. Sin apuntes. Es para recordar, no cuenta para nota.</a:t>
-            </a:r>
-          </a:p>
-        </p:txBody>
-      </p:sp>
-      <p:sp>
-        <p:nvSpPr>
-          <p:cNvPr id="4" name="Slide Number Placeholder 3"/>
-          <p:cNvSpPr>
-            <a:spLocks noGrp="1"/>
-          </p:cNvSpPr>
-          <p:nvPr>
-            <p:ph type="sldNum" idx="5" sz="quarter"/>
-          </p:nvPr>
-        </p:nvSpPr>
-        <p:spPr/>
-      </p:sp>
-    </p:spTree>
-  </p:cSld>
-  <p:clrMapOvr>
-    <a:masterClrMapping/>
-  </p:clrMapOvr>
-</p:notes>
-</file>
-
-<file path=ppt/notesSlides/notesSlide3.xml><?xml version="1.0" encoding="utf-8"?>
-<p:notes xmlns:a="http://schemas.openxmlformats.org/drawingml/2006/main" xmlns:p="http://schemas.openxmlformats.org/presentationml/2006/main" xmlns:r="http://schemas.openxmlformats.org/officeDocument/2006/relationships">
-  <p:cSld>
-    <p:spTree>
-      <p:nvGrpSpPr>
-        <p:cNvPr id="1" name=""/>
-        <p:cNvGrpSpPr/>
-        <p:nvPr/>
-      </p:nvGrpSpPr>
-      <p:grpSpPr>
-        <a:xfrm>
-          <a:off x="0" y="0"/>
-          <a:ext cx="0" cy="0"/>
-          <a:chOff x="0" y="0"/>
-          <a:chExt cx="0" cy="0"/>
-        </a:xfrm>
-      </p:grpSpPr>
-      <p:sp>
-        <p:nvSpPr>
-          <p:cNvPr id="2" name="Slide Image Placeholder 1"/>
-          <p:cNvSpPr>
-            <a:spLocks noGrp="1"/>
-          </p:cNvSpPr>
-          <p:nvPr>
-            <p:ph type="sldImg" idx="2"/>
-          </p:nvPr>
-        </p:nvSpPr>
-        <p:spPr/>
-      </p:sp>
-      <p:sp>
-        <p:nvSpPr>
-          <p:cNvPr id="3" name="Notes Placeholder 2"/>
-          <p:cNvSpPr>
-            <a:spLocks noGrp="1"/>
-          </p:cNvSpPr>
-          <p:nvPr>
-            <p:ph type="body" idx="3" sz="quarter"/>
-          </p:nvPr>
-        </p:nvSpPr>
-        <p:spPr/>
-        <p:txBody>
-          <a:bodyPr/>
-          <a:lstStyle/>
-          <a:p>
-            <a:r>
-              <a:t>Nadie tiene que contestar: solo pensarlo.</a:t>
-            </a:r>
-          </a:p>
-        </p:txBody>
-      </p:sp>
-      <p:sp>
-        <p:nvSpPr>
-          <p:cNvPr id="4" name="Slide Number Placeholder 3"/>
-          <p:cNvSpPr>
-            <a:spLocks noGrp="1"/>
-          </p:cNvSpPr>
-          <p:nvPr>
-            <p:ph type="sldNum" idx="5" sz="quarter"/>
-          </p:nvPr>
-        </p:nvSpPr>
-        <p:spPr/>
-      </p:sp>
-    </p:spTree>
-  </p:cSld>
-  <p:clrMapOvr>
-    <a:masterClrMapping/>
-  </p:clrMapOvr>
-</p:notes>
-</file>
-
-<file path=ppt/notesSlides/notesSlide4.xml><?xml version="1.0" encoding="utf-8"?>
-<p:notes xmlns:a="http://schemas.openxmlformats.org/drawingml/2006/main" xmlns:p="http://schemas.openxmlformats.org/presentationml/2006/main" xmlns:r="http://schemas.openxmlformats.org/officeDocument/2006/relationships">
-  <p:cSld>
-    <p:spTree>
-      <p:nvGrpSpPr>
-        <p:cNvPr id="1" name=""/>
-        <p:cNvGrpSpPr/>
-        <p:nvPr/>
-      </p:nvGrpSpPr>
-      <p:grpSpPr>
-        <a:xfrm>
-          <a:off x="0" y="0"/>
-          <a:ext cx="0" cy="0"/>
-          <a:chOff x="0" y="0"/>
-          <a:chExt cx="0" cy="0"/>
-        </a:xfrm>
-      </p:grpSpPr>
-      <p:sp>
-        <p:nvSpPr>
-          <p:cNvPr id="2" name="Slide Image Placeholder 1"/>
-          <p:cNvSpPr>
-            <a:spLocks noGrp="1"/>
-          </p:cNvSpPr>
-          <p:nvPr>
-            <p:ph type="sldImg" idx="2"/>
-          </p:nvPr>
-        </p:nvSpPr>
-        <p:spPr/>
-      </p:sp>
-      <p:sp>
-        <p:nvSpPr>
-          <p:cNvPr id="3" name="Notes Placeholder 2"/>
-          <p:cNvSpPr>
-            <a:spLocks noGrp="1"/>
-          </p:cNvSpPr>
-          <p:nvPr>
-            <p:ph type="body" idx="3" sz="quarter"/>
-          </p:nvPr>
-        </p:nvSpPr>
-        <p:spPr/>
-        <p:txBody>
-          <a:bodyPr/>
-          <a:lstStyle/>
-          <a:p>
-            <a:r>
-              <a:t>Dejar unos segundos para que piensen la respuesta fácil antes de enseñar los pasos.</a:t>
-            </a:r>
-          </a:p>
-        </p:txBody>
-      </p:sp>
-      <p:sp>
-        <p:nvSpPr>
-          <p:cNvPr id="4" name="Slide Number Placeholder 3"/>
-          <p:cNvSpPr>
-            <a:spLocks noGrp="1"/>
-          </p:cNvSpPr>
-          <p:nvPr>
-            <p:ph type="sldNum" idx="5" sz="quarter"/>
-          </p:nvPr>
-        </p:nvSpPr>
-        <p:spPr/>
-      </p:sp>
-    </p:spTree>
-  </p:cSld>
-  <p:clrMapOvr>
-    <a:masterClrMapping/>
-  </p:clrMapOvr>
-</p:notes>
-</file>
-
-<file path=ppt/notesSlides/notesSlide5.xml><?xml version="1.0" encoding="utf-8"?>
-<p:notes xmlns:a="http://schemas.openxmlformats.org/drawingml/2006/main" xmlns:p="http://schemas.openxmlformats.org/presentationml/2006/main" xmlns:r="http://schemas.openxmlformats.org/officeDocument/2006/relationships">
-  <p:cSld>
-    <p:spTree>
-      <p:nvGrpSpPr>
-        <p:cNvPr id="1" name=""/>
-        <p:cNvGrpSpPr/>
-        <p:nvPr/>
-      </p:nvGrpSpPr>
-      <p:grpSpPr>
-        <a:xfrm>
-          <a:off x="0" y="0"/>
-          <a:ext cx="0" cy="0"/>
-          <a:chOff x="0" y="0"/>
-          <a:chExt cx="0" cy="0"/>
-        </a:xfrm>
-      </p:grpSpPr>
-      <p:sp>
-        <p:nvSpPr>
-          <p:cNvPr id="2" name="Slide Image Placeholder 1"/>
-          <p:cNvSpPr>
-            <a:spLocks noGrp="1"/>
-          </p:cNvSpPr>
-          <p:nvPr>
-            <p:ph type="sldImg" idx="2"/>
-          </p:nvPr>
-        </p:nvSpPr>
-        <p:spPr/>
-      </p:sp>
-      <p:sp>
-        <p:nvSpPr>
-          <p:cNvPr id="3" name="Notes Placeholder 2"/>
-          <p:cNvSpPr>
-            <a:spLocks noGrp="1"/>
-          </p:cNvSpPr>
-          <p:nvPr>
-            <p:ph type="body" idx="3" sz="quarter"/>
-          </p:nvPr>
-        </p:nvSpPr>
-        <p:spPr/>
-        <p:txBody>
-          <a:bodyPr/>
-          <a:lstStyle/>
-          <a:p>
-            <a:r>
-              <a:t>Dejar 2 minutos para que lo escriban. La diapositiva siguiente muestra el resumen.</a:t>
-            </a:r>
-          </a:p>
-        </p:txBody>
-      </p:sp>
-      <p:sp>
-        <p:nvSpPr>
-          <p:cNvPr id="4" name="Slide Number Placeholder 3"/>
-          <p:cNvSpPr>
-            <a:spLocks noGrp="1"/>
-          </p:cNvSpPr>
-          <p:nvPr>
-            <p:ph type="sldNum" idx="5" sz="quarter"/>
-          </p:nvPr>
-        </p:nvSpPr>
-        <p:spPr/>
-      </p:sp>
-    </p:spTree>
-  </p:cSld>
-  <p:clrMapOvr>
-    <a:masterClrMapping/>
-  </p:clrMapOvr>
-</p:notes>
-</file>
-
-<file path=ppt/notesSlides/notesSlide6.xml><?xml version="1.0" encoding="utf-8"?>
-<p:notes xmlns:a="http://schemas.openxmlformats.org/drawingml/2006/main" xmlns:p="http://schemas.openxmlformats.org/presentationml/2006/main" xmlns:r="http://schemas.openxmlformats.org/officeDocument/2006/relationships">
-  <p:cSld>
-    <p:spTree>
-      <p:nvGrpSpPr>
-        <p:cNvPr id="1" name=""/>
-        <p:cNvGrpSpPr/>
-        <p:nvPr/>
-      </p:nvGrpSpPr>
-      <p:grpSpPr>
-        <a:xfrm>
-          <a:off x="0" y="0"/>
-          <a:ext cx="0" cy="0"/>
-          <a:chOff x="0" y="0"/>
-          <a:chExt cx="0" cy="0"/>
-        </a:xfrm>
-      </p:grpSpPr>
-      <p:sp>
-        <p:nvSpPr>
-          <p:cNvPr id="2" name="Slide Image Placeholder 1"/>
-          <p:cNvSpPr>
-            <a:spLocks noGrp="1"/>
-          </p:cNvSpPr>
-          <p:nvPr>
-            <p:ph type="sldImg" idx="2"/>
-          </p:nvPr>
-        </p:nvSpPr>
-        <p:spPr/>
-      </p:sp>
-      <p:sp>
-        <p:nvSpPr>
-          <p:cNvPr id="3" name="Notes Placeholder 2"/>
-          <p:cNvSpPr>
-            <a:spLocks noGrp="1"/>
-          </p:cNvSpPr>
-          <p:nvPr>
-            <p:ph type="body" idx="3" sz="quarter"/>
-          </p:nvPr>
-        </p:nvSpPr>
-        <p:spPr/>
-        <p:txBody>
-          <a:bodyPr/>
-          <a:lstStyle/>
-          <a:p>
-            <a:r>
-              <a:t>Buscar: «diferencia entre poder y autoridad» · «tipos de autoridad explicado fácil»</a:t>
-            </a:r>
-          </a:p>
-        </p:txBody>
-      </p:sp>
-      <p:sp>
-        <p:nvSpPr>
-          <p:cNvPr id="4" name="Slide Number Placeholder 3"/>
-          <p:cNvSpPr>
-            <a:spLocks noGrp="1"/>
-          </p:cNvSpPr>
-          <p:nvPr>
-            <p:ph type="sldNum" idx="5" sz="quarter"/>
-          </p:nvPr>
-        </p:nvSpPr>
-        <p:spPr/>
-      </p:sp>
-    </p:spTree>
-  </p:cSld>
-  <p:clrMapOvr>
-    <a:masterClrMapping/>
-  </p:clrMapOvr>
-</p:notes>
 </file>
 
 <file path=ppt/slideLayouts/slideLayout1.xml><?xml version="1.0" encoding="utf-8"?>

--- a/curso/pptx/S25.pptx
+++ b/curso/pptx/S25.pptx
@@ -4108,7 +4108,7 @@
                 </a:solidFill>
                 <a:latin typeface="Nunito Sans"/>
               </a:rPr>
-              <a:t>Naiara lleva la bici al taller. La mecánica le dice que la cadena está gastada y que hay que cambiarla.</a:t>
+              <a:t>Una chica lleva la bici al taller. La mecánica le dice que la cadena está gastada y que hay que cambiarla.</a:t>
             </a:r>
           </a:p>
         </p:txBody>
@@ -4181,7 +4181,7 @@
                 </a:solidFill>
                 <a:latin typeface="Nunito Sans"/>
               </a:rPr>
-              <a:t>¿Puede obligar a Naiara? No: no manda sobre ella.</a:t>
+              <a:t>¿Puede obligar a esa chica? No: no manda sobre ella.</a:t>
             </a:r>
           </a:p>
           <a:p>
@@ -4726,7 +4726,7 @@
                 </a:solidFill>
                 <a:latin typeface="Nunito Sans"/>
               </a:rPr>
-              <a:t>En la playa, el socorrista pita: «¡Fuera del agua, hay corrientes!». Iker: «Solo tiene poder. Tener poder no es tener razón».</a:t>
+              <a:t>En la playa, el socorrista pita: «¡Fuera del agua, hay corrientes!». Un chico: «Solo tiene poder. Tener poder no es tener razón».</a:t>
             </a:r>
           </a:p>
         </p:txBody>

--- a/curso/pptx/S25.pptx
+++ b/curso/pptx/S25.pptx
@@ -22,6 +22,8 @@
     <p:sldId id="270" r:id="rId22"/>
     <p:sldId id="271" r:id="rId23"/>
     <p:sldId id="272" r:id="rId24"/>
+    <p:sldId id="273" r:id="rId25"/>
+    <p:sldId id="274" r:id="rId26"/>
   </p:sldIdLst>
   <p:sldSz cx="12192000" cy="6858000" type="screen4x3"/>
   <p:notesSz cx="6858000" cy="9144000"/>
@@ -3535,7 +3537,7 @@
                 </a:solidFill>
                 <a:latin typeface="Nunito Sans"/>
               </a:rPr>
-              <a:t>PENSAMIENTO CRÍTICO · SESIÓN 25 · UNIDAD 5 · AUTORIDAD E INFLUENCIA</a:t>
+              <a:t>PENSAMIENTO CRÍTICO · SESIÓN 25 · UNIDAD 5 · FALACIAS II: RAZONAR MAL</a:t>
             </a:r>
           </a:p>
         </p:txBody>
@@ -3574,7 +3576,7 @@
                 </a:solidFill>
                 <a:latin typeface="Fredoka"/>
               </a:rPr>
-              <a:t>¿Qué es una autoridad?</a:t>
+              <a:t>Generalización apresurada</a:t>
             </a:r>
           </a:p>
         </p:txBody>
@@ -3613,7 +3615,7 @@
                 </a:solidFill>
                 <a:latin typeface="Nunito Sans"/>
               </a:rPr>
-              <a:t>Una autoridad por poder puede mandarte; una autoridad por saber te da buenas razones para creer algo.</a:t>
+              <a:t>La generalización apresurada saca una conclusión sobre todos a partir de pocos casos que no bastan.</a:t>
             </a:r>
           </a:p>
         </p:txBody>
@@ -3717,7 +3719,7 @@
                 </a:solidFill>
                 <a:latin typeface="Fredoka"/>
               </a:rPr>
-              <a:t>Caso 1 · El árbitro</a:t>
+              <a:t>Caso 1 · Las zapatillas</a:t>
             </a:r>
           </a:p>
         </p:txBody>
@@ -3799,7 +3801,7 @@
                 </a:solidFill>
                 <a:latin typeface="Nunito Sans"/>
               </a:rPr>
-              <a:t>En un partido del Athletic, el árbitro pita penalti. En la repetición se ve claro que no lo era.</a:t>
+              <a:t>«Mi primo compró unas zapatillas por internet y le llegaron rotas. Comprar por internet es siempre una estafa.»</a:t>
             </a:r>
           </a:p>
         </p:txBody>
@@ -3847,7 +3849,7 @@
                 </a:solidFill>
                 <a:latin typeface="Nunito Sans"/>
               </a:rPr>
-              <a:t>¿Qué autoridad tiene el árbitro? Por poder: el reglamento le da la última palabra.</a:t>
+              <a:t>¿Cuál es la conclusión? Comprar por internet es siempre una estafa.</a:t>
             </a:r>
           </a:p>
           <a:p>
@@ -3872,7 +3874,7 @@
                 </a:solidFill>
                 <a:latin typeface="Nunito Sans"/>
               </a:rPr>
-              <a:t>¿Acierta siempre? No: es una persona y puede equivocarse.</a:t>
+              <a:t>¿Cuántos casos hay? Uno: el del primo.</a:t>
             </a:r>
           </a:p>
           <a:p>
@@ -3897,7 +3899,7 @@
                 </a:solidFill>
                 <a:latin typeface="Nunito Sans"/>
               </a:rPr>
-              <a:t>¿Hay que obedecerle? En el partido, sí: su decisión cuenta.</a:t>
+              <a:t>¿Es suficiente? No: cada día hay muchísimas compras por internet, y la mayoría llegan bien.</a:t>
             </a:r>
           </a:p>
           <a:p>
@@ -3922,7 +3924,7 @@
                 </a:solidFill>
                 <a:latin typeface="Nunito Sans"/>
               </a:rPr>
-              <a:t>Conclusión: obedecer al árbitro no significa creer que tiene razón.</a:t>
+              <a:t>Conclusión: generalización apresurada. Lo justo sería: «a veces falla; conviene mirar bien la tienda».</a:t>
             </a:r>
           </a:p>
         </p:txBody>
@@ -4026,7 +4028,7 @@
                 </a:solidFill>
                 <a:latin typeface="Fredoka"/>
               </a:rPr>
-              <a:t>Caso 2 · La mecánica</a:t>
+              <a:t>Caso 2 · Un equipo entero</a:t>
             </a:r>
           </a:p>
         </p:txBody>
@@ -4108,7 +4110,7 @@
                 </a:solidFill>
                 <a:latin typeface="Nunito Sans"/>
               </a:rPr>
-              <a:t>Una chica lleva la bici al taller. La mecánica le dice que la cadena está gastada y que hay que cambiarla.</a:t>
+              <a:t>Una chica: «Un chico de otro equipo me empujó en el partido. Los de ese equipo son todos unos brutos».</a:t>
             </a:r>
           </a:p>
         </p:txBody>
@@ -4156,7 +4158,7 @@
                 </a:solidFill>
                 <a:latin typeface="Nunito Sans"/>
               </a:rPr>
-              <a:t>¿Qué autoridad tiene? Por saber: arregla bicis todos los días.</a:t>
+              <a:t>¿Cuántos casos? Uno.</a:t>
             </a:r>
           </a:p>
           <a:p>
@@ -4181,7 +4183,7 @@
                 </a:solidFill>
                 <a:latin typeface="Nunito Sans"/>
               </a:rPr>
-              <a:t>¿Puede obligar a esa chica? No: no manda sobre ella.</a:t>
+              <a:t>¿Cuántos jugadores hay en ese equipo? Muchos: uno no los representa.</a:t>
             </a:r>
           </a:p>
           <a:p>
@@ -4206,7 +4208,7 @@
                 </a:solidFill>
                 <a:latin typeface="Nunito Sans"/>
               </a:rPr>
-              <a:t>¿Por qué creerla? Porque sabe del tema y puede enseñarle la cadena gastada.</a:t>
+              <a:t>¿Es justo? No: culpa a muchos por lo que hizo uno. Cada persona es distinta.</a:t>
             </a:r>
           </a:p>
           <a:p>
@@ -4231,7 +4233,7 @@
                 </a:solidFill>
                 <a:latin typeface="Nunito Sans"/>
               </a:rPr>
-              <a:t>Conclusión: le hago caso por lo que sabe, no porque me mande.</a:t>
+              <a:t>Conclusión: generalización apresurada. Así empiezan los estereotipos.</a:t>
             </a:r>
           </a:p>
         </p:txBody>
@@ -4335,7 +4337,7 @@
                 </a:solidFill>
                 <a:latin typeface="Fredoka"/>
               </a:rPr>
-              <a:t>Caso 3 · La directora y el fútbol</a:t>
+              <a:t>Caso 3 · Cuando sí se puede generalizar</a:t>
             </a:r>
           </a:p>
         </p:txBody>
@@ -4417,7 +4419,7 @@
                 </a:solidFill>
                 <a:latin typeface="Nunito Sans"/>
               </a:rPr>
-              <a:t>La directora del instituto dice en el patio: «Este año el Athletic gana la Liga, seguro».</a:t>
+              <a:t>Imagina una encuesta a 500 alumnos de 20 institutos de Bizkaia. El 80 % dice que usa el móvil para estudiar (datos inventados).</a:t>
             </a:r>
           </a:p>
         </p:txBody>
@@ -4465,7 +4467,7 @@
                 </a:solidFill>
                 <a:latin typeface="Nunito Sans"/>
               </a:rPr>
-              <a:t>¿Tiene autoridad? Por poder, en el instituto: puede poner normas.</a:t>
+              <a:t>¿Cuántos casos? Muchos: 500.</a:t>
             </a:r>
           </a:p>
           <a:p>
@@ -4490,7 +4492,7 @@
                 </a:solidFill>
                 <a:latin typeface="Nunito Sans"/>
               </a:rPr>
-              <a:t>¿Tiene autoridad por saber sobre fútbol? No más que cualquier aficionado.</a:t>
+              <a:t>¿Son variados? Sí: de 20 institutos distintos.</a:t>
             </a:r>
           </a:p>
           <a:p>
@@ -4515,7 +4517,7 @@
                 </a:solidFill>
                 <a:latin typeface="Nunito Sans"/>
               </a:rPr>
-              <a:t>Su cargo no hace que su opinión sobre fútbol valga más.</a:t>
+              <a:t>¿Es suficiente? Para decir «la mayoría», sí; para decir «todos», no. Y no dice nada de cada alumno.</a:t>
             </a:r>
           </a:p>
           <a:p>
@@ -4540,7 +4542,7 @@
                 </a:solidFill>
                 <a:latin typeface="Nunito Sans"/>
               </a:rPr>
-              <a:t>Conclusión: el poder en un sitio no da saber en todos los temas.</a:t>
+              <a:t>Conclusión: no es falacia. Generalizar con muchos casos variados es una inducción bien hecha (sesión 16).</a:t>
             </a:r>
           </a:p>
         </p:txBody>
@@ -4644,7 +4646,7 @@
                 </a:solidFill>
                 <a:latin typeface="Fredoka"/>
               </a:rPr>
-              <a:t>⚠ El socorrista</a:t>
+              <a:t>⚠ Una sola cucharada</a:t>
             </a:r>
           </a:p>
         </p:txBody>
@@ -4726,7 +4728,7 @@
                 </a:solidFill>
                 <a:latin typeface="Nunito Sans"/>
               </a:rPr>
-              <a:t>En la playa, el socorrista pita: «¡Fuera del agua, hay corrientes!». Un chico: «Solo tiene poder. Tener poder no es tener razón».</a:t>
+              <a:t>Una chica prueba una cucharada de la sopa y dice: «Esta sopa está salada». Solo ha mirado un caso.</a:t>
             </a:r>
           </a:p>
         </p:txBody>
@@ -4774,7 +4776,7 @@
                 </a:solidFill>
                 <a:latin typeface="Nunito Sans"/>
               </a:rPr>
-              <a:t>¿Obedecerle es solo obedecer al que manda?</a:t>
+              <a:t>Un caso para hablar de toda la sopa… ¿generalización apresurada?</a:t>
             </a:r>
           </a:p>
           <a:p>
@@ -4799,7 +4801,7 @@
                 </a:solidFill>
                 <a:latin typeface="Nunito Sans"/>
               </a:rPr>
-              <a:t>Tiene poder: su cargo le deja mandar en la playa.</a:t>
+              <a:t>Parece que sí: saca una conclusión sobre toda la sopa con una sola cucharada.</a:t>
             </a:r>
           </a:p>
           <a:p>
@@ -4824,7 +4826,7 @@
                 </a:solidFill>
                 <a:latin typeface="Nunito Sans"/>
               </a:rPr>
-              <a:t>Pero también sabe: está formado para ver corrientes y mira el mar todo el día.</a:t>
+              <a:t>Pero la sopa está mezclada: todas las cucharadas son casi iguales.</a:t>
             </a:r>
           </a:p>
           <a:p>
@@ -4849,7 +4851,7 @@
                 </a:solidFill>
                 <a:latin typeface="Nunito Sans"/>
               </a:rPr>
-              <a:t>Aquí las dos autoridades van juntas, y hay muy buenas razones para salir.</a:t>
+              <a:t>Con personas, tiendas o partidos no pasa eso: cada caso puede ser muy distinto.</a:t>
             </a:r>
           </a:p>
           <a:p>
@@ -4874,7 +4876,25 @@
                 </a:solidFill>
                 <a:latin typeface="Nunito Sans"/>
               </a:rPr>
-              <a:t>Conclusión: «tener poder no es tener razón» no quiere decir que quien manda se equivoque. Mira si también sabe.</a:t>
+              <a:t>Conclusión: no es falacia. Cuántos casos hacen falta depende de lo </a:t>
+            </a:r>
+            <a:r>
+              <a:rPr sz="2400" b="1">
+                <a:solidFill>
+                  <a:srgbClr val="1F2A44"/>
+                </a:solidFill>
+                <a:latin typeface="Nunito Sans"/>
+              </a:rPr>
+              <a:t>variadas</a:t>
+            </a:r>
+            <a:r>
+              <a:rPr sz="2400" b="0">
+                <a:solidFill>
+                  <a:srgbClr val="1F2A44"/>
+                </a:solidFill>
+                <a:latin typeface="Nunito Sans"/>
+              </a:rPr>
+              <a:t> que sean las cosas.</a:t>
             </a:r>
           </a:p>
         </p:txBody>
@@ -4893,7 +4913,7 @@
     <p:bg>
       <p:bgPr>
         <a:solidFill>
-          <a:srgbClr val="FBF7EF"/>
+          <a:srgbClr val="1F2A44"/>
         </a:solidFill>
         <a:effectLst/>
       </p:bgPr>
@@ -4913,8 +4933,8 @@
         </p:nvSpPr>
         <p:spPr>
           <a:xfrm>
-            <a:off x="640000" y="380000"/>
-            <a:ext cx="10912000" cy="420000"/>
+            <a:off x="640000" y="2300000"/>
+            <a:ext cx="10912000" cy="500000"/>
           </a:xfrm>
           <a:prstGeom prst="rect">
             <a:avLst/>
@@ -4929,17 +4949,17 @@
           <a:p>
             <a:pPr>
               <a:spcAft>
-                <a:spcPts val="630"/>
-              </a:spcAft>
-            </a:pPr>
-            <a:r>
-              <a:rPr sz="1400" b="1">
-                <a:solidFill>
-                  <a:srgbClr val="E8793A"/>
-                </a:solidFill>
-                <a:latin typeface="Nunito Sans"/>
-              </a:rPr>
-              <a:t>LO DE HOY EN TRES LÍNEAS</a:t>
+                <a:spcPts val="810"/>
+              </a:spcAft>
+            </a:pPr>
+            <a:r>
+              <a:rPr sz="1800" b="1">
+                <a:solidFill>
+                  <a:srgbClr val="F4B183"/>
+                </a:solidFill>
+                <a:latin typeface="Nunito Sans"/>
+              </a:rPr>
+              <a:t>BLOQUE 3</a:t>
             </a:r>
           </a:p>
         </p:txBody>
@@ -4952,7 +4972,7 @@
         </p:nvSpPr>
         <p:spPr>
           <a:xfrm>
-            <a:off x="640000" y="760000"/>
+            <a:off x="640000" y="2800000"/>
             <a:ext cx="10912000" cy="800000"/>
           </a:xfrm>
           <a:prstGeom prst="rect">
@@ -4968,56 +4988,17 @@
           <a:p>
             <a:pPr>
               <a:spcAft>
-                <a:spcPts val="1710"/>
-              </a:spcAft>
-            </a:pPr>
-            <a:r>
-              <a:rPr sz="3800" b="1">
-                <a:solidFill>
-                  <a:srgbClr val="1F2A44"/>
+                <a:spcPts val="2160"/>
+              </a:spcAft>
+            </a:pPr>
+            <a:r>
+              <a:rPr sz="4800" b="1">
+                <a:solidFill>
+                  <a:srgbClr val="FBF7EF"/>
                 </a:solidFill>
                 <a:latin typeface="Fredoka"/>
               </a:rPr>
-              <a:t>Escríbelo tú primero, sin mirar</a:t>
-            </a:r>
-          </a:p>
-        </p:txBody>
-      </p:sp>
-      <p:sp>
-        <p:nvSpPr>
-          <p:cNvPr id="4" name="TextBox 3"/>
-          <p:cNvSpPr txBox="1"/>
-          <p:nvPr/>
-        </p:nvSpPr>
-        <p:spPr>
-          <a:xfrm>
-            <a:off x="640000" y="1800000"/>
-            <a:ext cx="10912000" cy="1500000"/>
-          </a:xfrm>
-          <a:prstGeom prst="rect">
-            <a:avLst/>
-          </a:prstGeom>
-          <a:noFill/>
-        </p:spPr>
-        <p:txBody>
-          <a:bodyPr wrap="square">
-            <a:spAutoFit/>
-          </a:bodyPr>
-          <a:lstStyle/>
-          <a:p>
-            <a:pPr>
-              <a:spcAft>
-                <a:spcPts val="1170"/>
-              </a:spcAft>
-            </a:pPr>
-            <a:r>
-              <a:rPr sz="2600" b="0">
-                <a:solidFill>
-                  <a:srgbClr val="4A5568"/>
-                </a:solidFill>
-                <a:latin typeface="Nunito Sans"/>
-              </a:rPr>
-              <a:t>Dos minutos. Después lo comparamos.</a:t>
+              <a:t>Generalizar bien y mal</a:t>
             </a:r>
           </a:p>
         </p:txBody>
@@ -5082,7 +5063,7 @@
                 </a:solidFill>
                 <a:latin typeface="Nunito Sans"/>
               </a:rPr>
-              <a:t>LO DE HOY EN TRES LÍNEAS</a:t>
+              <a:t>BLOQUE 3 · GENERALIZAR BIEN Y MAL</a:t>
             </a:r>
           </a:p>
         </p:txBody>
@@ -5095,8 +5076,8 @@
         </p:nvSpPr>
         <p:spPr>
           <a:xfrm>
-            <a:off x="640000" y="1300000"/>
-            <a:ext cx="10912000" cy="4800000"/>
+            <a:off x="640000" y="760000"/>
+            <a:ext cx="10912000" cy="800000"/>
           </a:xfrm>
           <a:prstGeom prst="rect">
             <a:avLst/>
@@ -5111,76 +5092,377 @@
           <a:p>
             <a:pPr>
               <a:spcAft>
-                <a:spcPts val="1350"/>
-              </a:spcAft>
-            </a:pPr>
-            <a:r>
-              <a:rPr sz="3000" b="1">
+                <a:spcPts val="1710"/>
+              </a:spcAft>
+            </a:pPr>
+            <a:r>
+              <a:rPr sz="3800" b="1">
+                <a:solidFill>
+                  <a:srgbClr val="1F2A44"/>
+                </a:solidFill>
+                <a:latin typeface="Fredoka"/>
+              </a:rPr>
+              <a:t>¿Apresurada o bien hecha?</a:t>
+            </a:r>
+          </a:p>
+        </p:txBody>
+      </p:sp>
+      <p:sp>
+        <p:nvSpPr>
+          <p:cNvPr id="4" name="Rectangle 3"/>
+          <p:cNvSpPr/>
+          <p:nvPr/>
+        </p:nvSpPr>
+        <p:spPr>
+          <a:xfrm>
+            <a:off x="640000" y="1650000"/>
+            <a:ext cx="5306000" cy="4400000"/>
+          </a:xfrm>
+          <a:prstGeom prst="rect">
+            <a:avLst/>
+          </a:prstGeom>
+          <a:solidFill>
+            <a:srgbClr val="FBE3D2"/>
+          </a:solidFill>
+          <a:ln>
+            <a:noFill/>
+          </a:ln>
+        </p:spPr>
+        <p:style>
+          <a:lnRef idx="1">
+            <a:schemeClr val="accent1"/>
+          </a:lnRef>
+          <a:fillRef idx="3">
+            <a:schemeClr val="accent1"/>
+          </a:fillRef>
+          <a:effectRef idx="2">
+            <a:schemeClr val="accent1"/>
+          </a:effectRef>
+          <a:fontRef idx="minor">
+            <a:schemeClr val="lt1"/>
+          </a:fontRef>
+        </p:style>
+        <p:txBody>
+          <a:bodyPr rtlCol="0" anchor="ctr"/>
+          <a:lstStyle/>
+          <a:p>
+            <a:pPr algn="ctr"/>
+          </a:p>
+        </p:txBody>
+      </p:sp>
+      <p:sp>
+        <p:nvSpPr>
+          <p:cNvPr id="5" name="TextBox 4"/>
+          <p:cNvSpPr txBox="1"/>
+          <p:nvPr/>
+        </p:nvSpPr>
+        <p:spPr>
+          <a:xfrm>
+            <a:off x="840000" y="1750000"/>
+            <a:ext cx="4906000" cy="600000"/>
+          </a:xfrm>
+          <a:prstGeom prst="rect">
+            <a:avLst/>
+          </a:prstGeom>
+          <a:noFill/>
+        </p:spPr>
+        <p:txBody>
+          <a:bodyPr wrap="square">
+            <a:spAutoFit/>
+          </a:bodyPr>
+          <a:lstStyle/>
+          <a:p>
+            <a:pPr>
+              <a:spcAft>
+                <a:spcPts val="1260"/>
+              </a:spcAft>
+            </a:pPr>
+            <a:r>
+              <a:rPr sz="2800" b="1">
+                <a:solidFill>
+                  <a:srgbClr val="C2531C"/>
+                </a:solidFill>
+                <a:latin typeface="Nunito Sans"/>
+              </a:rPr>
+              <a:t>Apresurada</a:t>
+            </a:r>
+          </a:p>
+        </p:txBody>
+      </p:sp>
+      <p:sp>
+        <p:nvSpPr>
+          <p:cNvPr id="6" name="TextBox 5"/>
+          <p:cNvSpPr txBox="1"/>
+          <p:nvPr/>
+        </p:nvSpPr>
+        <p:spPr>
+          <a:xfrm>
+            <a:off x="840000" y="2400000"/>
+            <a:ext cx="4906000" cy="3500000"/>
+          </a:xfrm>
+          <a:prstGeom prst="rect">
+            <a:avLst/>
+          </a:prstGeom>
+          <a:noFill/>
+        </p:spPr>
+        <p:txBody>
+          <a:bodyPr wrap="square">
+            <a:spAutoFit/>
+          </a:bodyPr>
+          <a:lstStyle/>
+          <a:p>
+            <a:pPr>
+              <a:spcAft>
+                <a:spcPts val="1170"/>
+              </a:spcAft>
+            </a:pPr>
+            <a:r>
+              <a:rPr sz="2600" b="1">
                 <a:solidFill>
                   <a:srgbClr val="E8793A"/>
                 </a:solidFill>
                 <a:latin typeface="Nunito Sans"/>
               </a:rPr>
-              <a:t>1. </a:t>
-            </a:r>
-            <a:r>
-              <a:rPr sz="3000" b="0">
+              <a:t>• </a:t>
+            </a:r>
+            <a:r>
+              <a:rPr sz="2600" b="0">
                 <a:solidFill>
                   <a:srgbClr val="1F2A44"/>
                 </a:solidFill>
                 <a:latin typeface="Nunito Sans"/>
               </a:rPr>
-              <a:t>Una autoridad es alguien a quien hacemos caso por su poder o por su saber.</a:t>
-            </a:r>
-          </a:p>
-          <a:p>
-            <a:pPr>
-              <a:spcAft>
-                <a:spcPts val="1350"/>
-              </a:spcAft>
-            </a:pPr>
-            <a:r>
-              <a:rPr sz="3000" b="1">
+              <a:t>Pocos casos, para cosas muy distintas entre sí</a:t>
+            </a:r>
+          </a:p>
+          <a:p>
+            <a:pPr>
+              <a:spcAft>
+                <a:spcPts val="1170"/>
+              </a:spcAft>
+            </a:pPr>
+            <a:r>
+              <a:rPr sz="2600" b="1">
                 <a:solidFill>
                   <a:srgbClr val="E8793A"/>
                 </a:solidFill>
                 <a:latin typeface="Nunito Sans"/>
               </a:rPr>
-              <a:t>2. </a:t>
-            </a:r>
-            <a:r>
-              <a:rPr sz="3000" b="0">
+              <a:t>• </a:t>
+            </a:r>
+            <a:r>
+              <a:rPr sz="2600" b="0">
                 <a:solidFill>
                   <a:srgbClr val="1F2A44"/>
                 </a:solidFill>
                 <a:latin typeface="Nunito Sans"/>
               </a:rPr>
-              <a:t>La autoridad por poder puede mandar; la autoridad por saber da razones.</a:t>
-            </a:r>
-          </a:p>
-          <a:p>
-            <a:pPr>
-              <a:spcAft>
-                <a:spcPts val="1350"/>
-              </a:spcAft>
-            </a:pPr>
-            <a:r>
-              <a:rPr sz="3000" b="1">
+              <a:t>Casos muy parecidos o elegidos a propósito</a:t>
+            </a:r>
+          </a:p>
+          <a:p>
+            <a:pPr>
+              <a:spcAft>
+                <a:spcPts val="1170"/>
+              </a:spcAft>
+            </a:pPr>
+            <a:r>
+              <a:rPr sz="2600" b="1">
                 <a:solidFill>
                   <a:srgbClr val="E8793A"/>
                 </a:solidFill>
                 <a:latin typeface="Nunito Sans"/>
               </a:rPr>
-              <a:t>3. </a:t>
-            </a:r>
-            <a:r>
-              <a:rPr sz="3000" b="0">
+              <a:t>• </a:t>
+            </a:r>
+            <a:r>
+              <a:rPr sz="2600" b="0">
                 <a:solidFill>
                   <a:srgbClr val="1F2A44"/>
                 </a:solidFill>
                 <a:latin typeface="Nunito Sans"/>
               </a:rPr>
-              <a:t>Tener poder no es lo mismo que tener razón, aunque a veces se tienen las dos.</a:t>
+              <a:t>Dice más de lo que muestran los casos</a:t>
+            </a:r>
+          </a:p>
+        </p:txBody>
+      </p:sp>
+      <p:sp>
+        <p:nvSpPr>
+          <p:cNvPr id="7" name="Rectangle 6"/>
+          <p:cNvSpPr/>
+          <p:nvPr/>
+        </p:nvSpPr>
+        <p:spPr>
+          <a:xfrm>
+            <a:off x="6246000" y="1650000"/>
+            <a:ext cx="5306000" cy="4400000"/>
+          </a:xfrm>
+          <a:prstGeom prst="rect">
+            <a:avLst/>
+          </a:prstGeom>
+          <a:solidFill>
+            <a:srgbClr val="EAF0F7"/>
+          </a:solidFill>
+          <a:ln>
+            <a:noFill/>
+          </a:ln>
+        </p:spPr>
+        <p:style>
+          <a:lnRef idx="1">
+            <a:schemeClr val="accent1"/>
+          </a:lnRef>
+          <a:fillRef idx="3">
+            <a:schemeClr val="accent1"/>
+          </a:fillRef>
+          <a:effectRef idx="2">
+            <a:schemeClr val="accent1"/>
+          </a:effectRef>
+          <a:fontRef idx="minor">
+            <a:schemeClr val="lt1"/>
+          </a:fontRef>
+        </p:style>
+        <p:txBody>
+          <a:bodyPr rtlCol="0" anchor="ctr"/>
+          <a:lstStyle/>
+          <a:p>
+            <a:pPr algn="ctr"/>
+          </a:p>
+        </p:txBody>
+      </p:sp>
+      <p:sp>
+        <p:nvSpPr>
+          <p:cNvPr id="8" name="TextBox 7"/>
+          <p:cNvSpPr txBox="1"/>
+          <p:nvPr/>
+        </p:nvSpPr>
+        <p:spPr>
+          <a:xfrm>
+            <a:off x="6446000" y="1750000"/>
+            <a:ext cx="4906000" cy="600000"/>
+          </a:xfrm>
+          <a:prstGeom prst="rect">
+            <a:avLst/>
+          </a:prstGeom>
+          <a:noFill/>
+        </p:spPr>
+        <p:txBody>
+          <a:bodyPr wrap="square">
+            <a:spAutoFit/>
+          </a:bodyPr>
+          <a:lstStyle/>
+          <a:p>
+            <a:pPr>
+              <a:spcAft>
+                <a:spcPts val="1260"/>
+              </a:spcAft>
+            </a:pPr>
+            <a:r>
+              <a:rPr sz="2800" b="1">
+                <a:solidFill>
+                  <a:srgbClr val="2F6FB5"/>
+                </a:solidFill>
+                <a:latin typeface="Nunito Sans"/>
+              </a:rPr>
+              <a:t>Bien hecha</a:t>
+            </a:r>
+          </a:p>
+        </p:txBody>
+      </p:sp>
+      <p:sp>
+        <p:nvSpPr>
+          <p:cNvPr id="9" name="TextBox 8"/>
+          <p:cNvSpPr txBox="1"/>
+          <p:nvPr/>
+        </p:nvSpPr>
+        <p:spPr>
+          <a:xfrm>
+            <a:off x="6446000" y="2400000"/>
+            <a:ext cx="4906000" cy="3500000"/>
+          </a:xfrm>
+          <a:prstGeom prst="rect">
+            <a:avLst/>
+          </a:prstGeom>
+          <a:noFill/>
+        </p:spPr>
+        <p:txBody>
+          <a:bodyPr wrap="square">
+            <a:spAutoFit/>
+          </a:bodyPr>
+          <a:lstStyle/>
+          <a:p>
+            <a:pPr>
+              <a:spcAft>
+                <a:spcPts val="1170"/>
+              </a:spcAft>
+            </a:pPr>
+            <a:r>
+              <a:rPr sz="2600" b="1">
+                <a:solidFill>
+                  <a:srgbClr val="E8793A"/>
+                </a:solidFill>
+                <a:latin typeface="Nunito Sans"/>
+              </a:rPr>
+              <a:t>• </a:t>
+            </a:r>
+            <a:r>
+              <a:rPr sz="2600" b="0">
+                <a:solidFill>
+                  <a:srgbClr val="1F2A44"/>
+                </a:solidFill>
+                <a:latin typeface="Nunito Sans"/>
+              </a:rPr>
+              <a:t>Casos suficientes para lo variadas que son las cosas</a:t>
+            </a:r>
+          </a:p>
+          <a:p>
+            <a:pPr>
+              <a:spcAft>
+                <a:spcPts val="1170"/>
+              </a:spcAft>
+            </a:pPr>
+            <a:r>
+              <a:rPr sz="2600" b="1">
+                <a:solidFill>
+                  <a:srgbClr val="E8793A"/>
+                </a:solidFill>
+                <a:latin typeface="Nunito Sans"/>
+              </a:rPr>
+              <a:t>• </a:t>
+            </a:r>
+            <a:r>
+              <a:rPr sz="2600" b="0">
+                <a:solidFill>
+                  <a:srgbClr val="1F2A44"/>
+                </a:solidFill>
+                <a:latin typeface="Nunito Sans"/>
+              </a:rPr>
+              <a:t>Casos variados</a:t>
+            </a:r>
+          </a:p>
+          <a:p>
+            <a:pPr>
+              <a:spcAft>
+                <a:spcPts val="1170"/>
+              </a:spcAft>
+            </a:pPr>
+            <a:r>
+              <a:rPr sz="2600" b="1">
+                <a:solidFill>
+                  <a:srgbClr val="E8793A"/>
+                </a:solidFill>
+                <a:latin typeface="Nunito Sans"/>
+              </a:rPr>
+              <a:t>• </a:t>
+            </a:r>
+            <a:r>
+              <a:rPr sz="2600" b="0">
+                <a:solidFill>
+                  <a:srgbClr val="1F2A44"/>
+                </a:solidFill>
+                <a:latin typeface="Nunito Sans"/>
+              </a:rPr>
+              <a:t>Dice solo lo que muestran: «la mayoría», «a menudo»</a:t>
             </a:r>
           </a:p>
         </p:txBody>
@@ -5194,6 +5476,312 @@
 </file>
 
 <file path=ppt/slides/slide16.xml><?xml version="1.0" encoding="utf-8"?>
+<p:sld xmlns:a="http://schemas.openxmlformats.org/drawingml/2006/main" xmlns:p="http://schemas.openxmlformats.org/presentationml/2006/main" xmlns:r="http://schemas.openxmlformats.org/officeDocument/2006/relationships">
+  <p:cSld>
+    <p:bg>
+      <p:bgPr>
+        <a:solidFill>
+          <a:srgbClr val="FBF7EF"/>
+        </a:solidFill>
+        <a:effectLst/>
+      </p:bgPr>
+    </p:bg>
+    <p:spTree>
+      <p:nvGrpSpPr>
+        <p:cNvPr id="1" name=""/>
+        <p:cNvGrpSpPr/>
+        <p:nvPr/>
+      </p:nvGrpSpPr>
+      <p:grpSpPr/>
+      <p:sp>
+        <p:nvSpPr>
+          <p:cNvPr id="2" name="TextBox 1"/>
+          <p:cNvSpPr txBox="1"/>
+          <p:nvPr/>
+        </p:nvSpPr>
+        <p:spPr>
+          <a:xfrm>
+            <a:off x="640000" y="380000"/>
+            <a:ext cx="10912000" cy="420000"/>
+          </a:xfrm>
+          <a:prstGeom prst="rect">
+            <a:avLst/>
+          </a:prstGeom>
+          <a:noFill/>
+        </p:spPr>
+        <p:txBody>
+          <a:bodyPr wrap="square">
+            <a:spAutoFit/>
+          </a:bodyPr>
+          <a:lstStyle/>
+          <a:p>
+            <a:pPr>
+              <a:spcAft>
+                <a:spcPts val="630"/>
+              </a:spcAft>
+            </a:pPr>
+            <a:r>
+              <a:rPr sz="1400" b="1">
+                <a:solidFill>
+                  <a:srgbClr val="E8793A"/>
+                </a:solidFill>
+                <a:latin typeface="Nunito Sans"/>
+              </a:rPr>
+              <a:t>LO DE HOY EN TRES LÍNEAS</a:t>
+            </a:r>
+          </a:p>
+        </p:txBody>
+      </p:sp>
+      <p:sp>
+        <p:nvSpPr>
+          <p:cNvPr id="3" name="TextBox 2"/>
+          <p:cNvSpPr txBox="1"/>
+          <p:nvPr/>
+        </p:nvSpPr>
+        <p:spPr>
+          <a:xfrm>
+            <a:off x="640000" y="760000"/>
+            <a:ext cx="10912000" cy="800000"/>
+          </a:xfrm>
+          <a:prstGeom prst="rect">
+            <a:avLst/>
+          </a:prstGeom>
+          <a:noFill/>
+        </p:spPr>
+        <p:txBody>
+          <a:bodyPr wrap="square">
+            <a:spAutoFit/>
+          </a:bodyPr>
+          <a:lstStyle/>
+          <a:p>
+            <a:pPr>
+              <a:spcAft>
+                <a:spcPts val="1710"/>
+              </a:spcAft>
+            </a:pPr>
+            <a:r>
+              <a:rPr sz="3800" b="1">
+                <a:solidFill>
+                  <a:srgbClr val="1F2A44"/>
+                </a:solidFill>
+                <a:latin typeface="Fredoka"/>
+              </a:rPr>
+              <a:t>Escríbelo tú primero, sin mirar</a:t>
+            </a:r>
+          </a:p>
+        </p:txBody>
+      </p:sp>
+      <p:sp>
+        <p:nvSpPr>
+          <p:cNvPr id="4" name="TextBox 3"/>
+          <p:cNvSpPr txBox="1"/>
+          <p:nvPr/>
+        </p:nvSpPr>
+        <p:spPr>
+          <a:xfrm>
+            <a:off x="640000" y="1800000"/>
+            <a:ext cx="10912000" cy="1500000"/>
+          </a:xfrm>
+          <a:prstGeom prst="rect">
+            <a:avLst/>
+          </a:prstGeom>
+          <a:noFill/>
+        </p:spPr>
+        <p:txBody>
+          <a:bodyPr wrap="square">
+            <a:spAutoFit/>
+          </a:bodyPr>
+          <a:lstStyle/>
+          <a:p>
+            <a:pPr>
+              <a:spcAft>
+                <a:spcPts val="1170"/>
+              </a:spcAft>
+            </a:pPr>
+            <a:r>
+              <a:rPr sz="2600" b="0">
+                <a:solidFill>
+                  <a:srgbClr val="4A5568"/>
+                </a:solidFill>
+                <a:latin typeface="Nunito Sans"/>
+              </a:rPr>
+              <a:t>Dos minutos. Después lo comparamos.</a:t>
+            </a:r>
+          </a:p>
+        </p:txBody>
+      </p:sp>
+    </p:spTree>
+  </p:cSld>
+  <p:clrMapOvr>
+    <a:masterClrMapping/>
+  </p:clrMapOvr>
+</p:sld>
+</file>
+
+<file path=ppt/slides/slide17.xml><?xml version="1.0" encoding="utf-8"?>
+<p:sld xmlns:a="http://schemas.openxmlformats.org/drawingml/2006/main" xmlns:p="http://schemas.openxmlformats.org/presentationml/2006/main" xmlns:r="http://schemas.openxmlformats.org/officeDocument/2006/relationships">
+  <p:cSld>
+    <p:bg>
+      <p:bgPr>
+        <a:solidFill>
+          <a:srgbClr val="FBF7EF"/>
+        </a:solidFill>
+        <a:effectLst/>
+      </p:bgPr>
+    </p:bg>
+    <p:spTree>
+      <p:nvGrpSpPr>
+        <p:cNvPr id="1" name=""/>
+        <p:cNvGrpSpPr/>
+        <p:nvPr/>
+      </p:nvGrpSpPr>
+      <p:grpSpPr/>
+      <p:sp>
+        <p:nvSpPr>
+          <p:cNvPr id="2" name="TextBox 1"/>
+          <p:cNvSpPr txBox="1"/>
+          <p:nvPr/>
+        </p:nvSpPr>
+        <p:spPr>
+          <a:xfrm>
+            <a:off x="640000" y="380000"/>
+            <a:ext cx="10912000" cy="420000"/>
+          </a:xfrm>
+          <a:prstGeom prst="rect">
+            <a:avLst/>
+          </a:prstGeom>
+          <a:noFill/>
+        </p:spPr>
+        <p:txBody>
+          <a:bodyPr wrap="square">
+            <a:spAutoFit/>
+          </a:bodyPr>
+          <a:lstStyle/>
+          <a:p>
+            <a:pPr>
+              <a:spcAft>
+                <a:spcPts val="630"/>
+              </a:spcAft>
+            </a:pPr>
+            <a:r>
+              <a:rPr sz="1400" b="1">
+                <a:solidFill>
+                  <a:srgbClr val="E8793A"/>
+                </a:solidFill>
+                <a:latin typeface="Nunito Sans"/>
+              </a:rPr>
+              <a:t>LO DE HOY EN TRES LÍNEAS</a:t>
+            </a:r>
+          </a:p>
+        </p:txBody>
+      </p:sp>
+      <p:sp>
+        <p:nvSpPr>
+          <p:cNvPr id="3" name="TextBox 2"/>
+          <p:cNvSpPr txBox="1"/>
+          <p:nvPr/>
+        </p:nvSpPr>
+        <p:spPr>
+          <a:xfrm>
+            <a:off x="640000" y="1300000"/>
+            <a:ext cx="10912000" cy="4800000"/>
+          </a:xfrm>
+          <a:prstGeom prst="rect">
+            <a:avLst/>
+          </a:prstGeom>
+          <a:noFill/>
+        </p:spPr>
+        <p:txBody>
+          <a:bodyPr wrap="square">
+            <a:spAutoFit/>
+          </a:bodyPr>
+          <a:lstStyle/>
+          <a:p>
+            <a:pPr>
+              <a:spcAft>
+                <a:spcPts val="1350"/>
+              </a:spcAft>
+            </a:pPr>
+            <a:r>
+              <a:rPr sz="3000" b="1">
+                <a:solidFill>
+                  <a:srgbClr val="E8793A"/>
+                </a:solidFill>
+                <a:latin typeface="Nunito Sans"/>
+              </a:rPr>
+              <a:t>1. </a:t>
+            </a:r>
+            <a:r>
+              <a:rPr sz="3000" b="0">
+                <a:solidFill>
+                  <a:srgbClr val="1F2A44"/>
+                </a:solidFill>
+                <a:latin typeface="Nunito Sans"/>
+              </a:rPr>
+              <a:t>La generalización apresurada pasa de pocos casos que no bastan a «todos» o «siempre».</a:t>
+            </a:r>
+          </a:p>
+          <a:p>
+            <a:pPr>
+              <a:spcAft>
+                <a:spcPts val="1350"/>
+              </a:spcAft>
+            </a:pPr>
+            <a:r>
+              <a:rPr sz="3000" b="1">
+                <a:solidFill>
+                  <a:srgbClr val="E8793A"/>
+                </a:solidFill>
+                <a:latin typeface="Nunito Sans"/>
+              </a:rPr>
+              <a:t>2. </a:t>
+            </a:r>
+            <a:r>
+              <a:rPr sz="3000" b="0">
+                <a:solidFill>
+                  <a:srgbClr val="1F2A44"/>
+                </a:solidFill>
+                <a:latin typeface="Nunito Sans"/>
+              </a:rPr>
+              <a:t>Para desmontarla: ¿cuántos casos has mirado? ¿Son suficientes?</a:t>
+            </a:r>
+          </a:p>
+          <a:p>
+            <a:pPr>
+              <a:spcAft>
+                <a:spcPts val="1350"/>
+              </a:spcAft>
+            </a:pPr>
+            <a:r>
+              <a:rPr sz="3000" b="1">
+                <a:solidFill>
+                  <a:srgbClr val="E8793A"/>
+                </a:solidFill>
+                <a:latin typeface="Nunito Sans"/>
+              </a:rPr>
+              <a:t>3. </a:t>
+            </a:r>
+            <a:r>
+              <a:rPr sz="3000" b="0">
+                <a:solidFill>
+                  <a:srgbClr val="1F2A44"/>
+                </a:solidFill>
+                <a:latin typeface="Nunito Sans"/>
+              </a:rPr>
+              <a:t>Generalizar está bien con casos suficientes y variados, sin decir más de lo que muestran.</a:t>
+            </a:r>
+          </a:p>
+        </p:txBody>
+      </p:sp>
+    </p:spTree>
+  </p:cSld>
+  <p:clrMapOvr>
+    <a:masterClrMapping/>
+  </p:clrMapOvr>
+</p:sld>
+</file>
+
+<file path=ppt/slides/slide18.xml><?xml version="1.0" encoding="utf-8"?>
 <p:sld xmlns:a="http://schemas.openxmlformats.org/drawingml/2006/main" xmlns:p="http://schemas.openxmlformats.org/presentationml/2006/main" xmlns:r="http://schemas.openxmlformats.org/officeDocument/2006/relationships">
   <p:cSld>
     <p:bg>
@@ -5284,7 +5872,7 @@
                 </a:solidFill>
                 <a:latin typeface="Fredoka"/>
               </a:rPr>
-              <a:t>Diferencia entre poder y autoridad por conocimiento</a:t>
+              <a:t>La generalización apresurada y los estereotipos</a:t>
             </a:r>
           </a:p>
         </p:txBody>
@@ -5323,7 +5911,7 @@
                 </a:solidFill>
                 <a:latin typeface="Nunito Sans"/>
               </a:rPr>
-              <a:t>Que vean con otros ejemplos que obedecer a quien manda no es lo mismo que creer a quien sabe.</a:t>
+              <a:t>Ver cómo de un caso se salta a «todos», también con grupos de personas.</a:t>
             </a:r>
           </a:p>
         </p:txBody>
@@ -5336,7 +5924,7 @@
 </p:sld>
 </file>
 
-<file path=ppt/slides/slide17.xml><?xml version="1.0" encoding="utf-8"?>
+<file path=ppt/slides/slide19.xml><?xml version="1.0" encoding="utf-8"?>
 <p:sld xmlns:a="http://schemas.openxmlformats.org/drawingml/2006/main" xmlns:p="http://schemas.openxmlformats.org/presentationml/2006/main" xmlns:r="http://schemas.openxmlformats.org/officeDocument/2006/relationships">
   <p:cSld>
     <p:bg>
@@ -5981,7 +6569,7 @@
                 </a:solidFill>
                 <a:latin typeface="Nunito Sans"/>
               </a:rPr>
-              <a:t>En las falacias de la unidad 4, las razones no ______ para la conclusión.  (sesión 24)</a:t>
+              <a:t>Una falacia es un argumento que parece bueno, pero sus razones no sostienen la ______.  (sesión 24)</a:t>
             </a:r>
           </a:p>
           <a:p>
@@ -6006,7 +6594,7 @@
                 </a:solidFill>
                 <a:latin typeface="Nunito Sans"/>
               </a:rPr>
-              <a:t>El falso dilema presenta solo dos ______.  (sesión 24)</a:t>
+              <a:t>La apelación al miedo ______ sin pruebas.  (sesión 24)</a:t>
             </a:r>
           </a:p>
           <a:p>
@@ -6031,7 +6619,7 @@
                 </a:solidFill>
                 <a:latin typeface="Nunito Sans"/>
               </a:rPr>
-              <a:t>Las tres preguntas de una buena razón: ¿es verdad?, ¿viene a ______?, ¿es ______?  (sesión 13)</a:t>
+              <a:t>Las palabras pista como «porque» o «por tanto» se llaman ______.  (sesión 13)</a:t>
             </a:r>
           </a:p>
         </p:txBody>
@@ -6183,7 +6771,7 @@
                 </a:solidFill>
                 <a:latin typeface="Nunito Sans"/>
               </a:rPr>
-              <a:t>En las falacias de la unidad 4, las razones no </a:t>
+              <a:t>Una falacia es un argumento que parece bueno, pero sus razones no sostienen la </a:t>
             </a:r>
             <a:r>
               <a:rPr sz="2600" b="1">
@@ -6192,7 +6780,7 @@
                 </a:solidFill>
                 <a:latin typeface="Nunito Sans"/>
               </a:rPr>
-              <a:t>bastan</a:t>
+              <a:t>conclusión</a:t>
             </a:r>
             <a:r>
               <a:rPr sz="2600" b="0">
@@ -6201,7 +6789,7 @@
                 </a:solidFill>
                 <a:latin typeface="Nunito Sans"/>
               </a:rPr>
-              <a:t> para la conclusión.  (sesión 24)</a:t>
+              <a:t>.  (sesión 24)</a:t>
             </a:r>
           </a:p>
           <a:p>
@@ -6226,7 +6814,7 @@
                 </a:solidFill>
                 <a:latin typeface="Nunito Sans"/>
               </a:rPr>
-              <a:t>El falso dilema presenta solo dos </a:t>
+              <a:t>La apelación al miedo </a:t>
             </a:r>
             <a:r>
               <a:rPr sz="2600" b="1">
@@ -6235,7 +6823,7 @@
                 </a:solidFill>
                 <a:latin typeface="Nunito Sans"/>
               </a:rPr>
-              <a:t>opciones</a:t>
+              <a:t>asusta</a:t>
             </a:r>
             <a:r>
               <a:rPr sz="2600" b="0">
@@ -6244,7 +6832,7 @@
                 </a:solidFill>
                 <a:latin typeface="Nunito Sans"/>
               </a:rPr>
-              <a:t>.  (sesión 24)</a:t>
+              <a:t> sin pruebas.  (sesión 24)</a:t>
             </a:r>
           </a:p>
           <a:p>
@@ -6269,7 +6857,7 @@
                 </a:solidFill>
                 <a:latin typeface="Nunito Sans"/>
               </a:rPr>
-              <a:t>Las tres preguntas de una buena razón: ¿es verdad?, ¿viene a </a:t>
+              <a:t>Las palabras pista como «porque» o «por tanto» se llaman </a:t>
             </a:r>
             <a:r>
               <a:rPr sz="2600" b="1">
@@ -6278,7 +6866,7 @@
                 </a:solidFill>
                 <a:latin typeface="Nunito Sans"/>
               </a:rPr>
-              <a:t>cuento</a:t>
+              <a:t>indicadores</a:t>
             </a:r>
             <a:r>
               <a:rPr sz="2600" b="0">
@@ -6287,25 +6875,7 @@
                 </a:solidFill>
                 <a:latin typeface="Nunito Sans"/>
               </a:rPr>
-              <a:t>?, ¿es </a:t>
-            </a:r>
-            <a:r>
-              <a:rPr sz="2600" b="1">
-                <a:solidFill>
-                  <a:srgbClr val="1F2A44"/>
-                </a:solidFill>
-                <a:latin typeface="Nunito Sans"/>
-              </a:rPr>
-              <a:t>suficiente</a:t>
-            </a:r>
-            <a:r>
-              <a:rPr sz="2600" b="0">
-                <a:solidFill>
-                  <a:srgbClr val="1F2A44"/>
-                </a:solidFill>
-                <a:latin typeface="Nunito Sans"/>
-              </a:rPr>
-              <a:t>?  (sesión 13)</a:t>
+              <a:t>.  (sesión 13)</a:t>
             </a:r>
           </a:p>
         </p:txBody>
@@ -6452,7 +7022,7 @@
                 </a:solidFill>
                 <a:latin typeface="Nunito Sans"/>
               </a:rPr>
-              <a:t>Tu entrenador te dice: «Sal al campo». Tu médica te dice: «Tómate este jarabe». Los dos «mandan».</a:t>
+              <a:t>«Mi primo compró unas zapatillas por internet y le llegaron rotas. Comprar por internet es siempre una estafa.»</a:t>
             </a:r>
           </a:p>
         </p:txBody>
@@ -6491,7 +7061,7 @@
                 </a:solidFill>
                 <a:latin typeface="Nunito Sans"/>
               </a:rPr>
-              <a:t>¿Les haces caso por el mismo motivo?</a:t>
+              <a:t>¿Cuántos casos ha mirado? ¿Basta con eso para decir «siempre»?</a:t>
             </a:r>
           </a:p>
         </p:txBody>
@@ -6595,7 +7165,7 @@
                 </a:solidFill>
                 <a:latin typeface="Fredoka"/>
               </a:rPr>
-              <a:t>Dos tipos de autoridad</a:t>
+              <a:t>De un caso a «todos»</a:t>
             </a:r>
           </a:p>
         </p:txBody>
@@ -6660,7 +7230,7 @@
                 </a:solidFill>
                 <a:latin typeface="Nunito Sans"/>
               </a:rPr>
-              <a:t>BLOQUE 1 · DOS TIPOS DE AUTORIDAD</a:t>
+              <a:t>BLOQUE 1 · DE UN CASO A «TODOS»</a:t>
             </a:r>
           </a:p>
         </p:txBody>
@@ -6699,7 +7269,7 @@
                 </a:solidFill>
                 <a:latin typeface="Fredoka"/>
               </a:rPr>
-              <a:t>Autoridad</a:t>
+              <a:t>Generalización apresurada</a:t>
             </a:r>
           </a:p>
         </p:txBody>
@@ -6781,7 +7351,7 @@
                 </a:solidFill>
                 <a:latin typeface="Nunito Sans"/>
               </a:rPr>
-              <a:t>Una autoridad es alguien a quien hacemos caso por lo que es o por lo que sabe.</a:t>
+              <a:t>Sacar una conclusión sobre todos (o sobre «siempre») a partir de pocos casos que no bastan.</a:t>
             </a:r>
           </a:p>
         </p:txBody>
@@ -6823,13 +7393,38 @@
               <a:t>• </a:t>
             </a:r>
             <a:r>
+              <a:rPr sz="2800" b="0">
+                <a:solidFill>
+                  <a:srgbClr val="1F2A44"/>
+                </a:solidFill>
+                <a:latin typeface="Nunito Sans"/>
+              </a:rPr>
+              <a:t>También se llama generalización </a:t>
+            </a:r>
+            <a:r>
               <a:rPr sz="2800" b="1">
                 <a:solidFill>
                   <a:srgbClr val="1F2A44"/>
                 </a:solidFill>
                 <a:latin typeface="Nunito Sans"/>
               </a:rPr>
-              <a:t>Por poder:</a:t>
+              <a:t>precipitada</a:t>
+            </a:r>
+          </a:p>
+          <a:p>
+            <a:pPr>
+              <a:spcAft>
+                <a:spcPts val="1260"/>
+              </a:spcAft>
+            </a:pPr>
+            <a:r>
+              <a:rPr sz="2800" b="1">
+                <a:solidFill>
+                  <a:srgbClr val="E8793A"/>
+                </a:solidFill>
+                <a:latin typeface="Nunito Sans"/>
+              </a:rPr>
+              <a:t>• </a:t>
             </a:r>
             <a:r>
               <a:rPr sz="2800" b="0">
@@ -6838,7 +7433,25 @@
                 </a:solidFill>
                 <a:latin typeface="Nunito Sans"/>
               </a:rPr>
-              <a:t> puede mandar, porque tiene un cargo</a:t>
+              <a:t>Falla la pregunta </a:t>
+            </a:r>
+            <a:r>
+              <a:rPr sz="2800" b="1">
+                <a:solidFill>
+                  <a:srgbClr val="1F2A44"/>
+                </a:solidFill>
+                <a:latin typeface="Nunito Sans"/>
+              </a:rPr>
+              <a:t>¿es suficiente?</a:t>
+            </a:r>
+            <a:r>
+              <a:rPr sz="2800" b="0">
+                <a:solidFill>
+                  <a:srgbClr val="1F2A44"/>
+                </a:solidFill>
+                <a:latin typeface="Nunito Sans"/>
+              </a:rPr>
+              <a:t> (sesión 15)</a:t>
             </a:r>
           </a:p>
           <a:p>
@@ -6857,47 +7470,22 @@
               <a:t>• </a:t>
             </a:r>
             <a:r>
+              <a:rPr sz="2800" b="0">
+                <a:solidFill>
+                  <a:srgbClr val="1F2A44"/>
+                </a:solidFill>
+                <a:latin typeface="Nunito Sans"/>
+              </a:rPr>
+              <a:t>Pregunta: </a:t>
+            </a:r>
+            <a:r>
               <a:rPr sz="2800" b="1">
                 <a:solidFill>
                   <a:srgbClr val="1F2A44"/>
                 </a:solidFill>
                 <a:latin typeface="Nunito Sans"/>
               </a:rPr>
-              <a:t>Por saber:</a:t>
-            </a:r>
-            <a:r>
-              <a:rPr sz="2800" b="0">
-                <a:solidFill>
-                  <a:srgbClr val="1F2A44"/>
-                </a:solidFill>
-                <a:latin typeface="Nunito Sans"/>
-              </a:rPr>
-              <a:t> sabe mucho de un tema</a:t>
-            </a:r>
-          </a:p>
-          <a:p>
-            <a:pPr>
-              <a:spcAft>
-                <a:spcPts val="1260"/>
-              </a:spcAft>
-            </a:pPr>
-            <a:r>
-              <a:rPr sz="2800" b="1">
-                <a:solidFill>
-                  <a:srgbClr val="E8793A"/>
-                </a:solidFill>
-                <a:latin typeface="Nunito Sans"/>
-              </a:rPr>
-              <a:t>• </a:t>
-            </a:r>
-            <a:r>
-              <a:rPr sz="2800" b="0">
-                <a:solidFill>
-                  <a:srgbClr val="1F2A44"/>
-                </a:solidFill>
-                <a:latin typeface="Nunito Sans"/>
-              </a:rPr>
-              <a:t>Una misma persona puede tener las dos</a:t>
+              <a:t>¿cuántos casos has mirado? ¿Son suficientes?</a:t>
             </a:r>
           </a:p>
         </p:txBody>
@@ -6962,7 +7550,7 @@
                 </a:solidFill>
                 <a:latin typeface="Nunito Sans"/>
               </a:rPr>
-              <a:t>BLOQUE 1 · DOS TIPOS DE AUTORIDAD</a:t>
+              <a:t>BLOQUE 1 · DE UN CASO A «TODOS»</a:t>
             </a:r>
           </a:p>
         </p:txBody>
@@ -7001,378 +7589,215 @@
                 </a:solidFill>
                 <a:latin typeface="Fredoka"/>
               </a:rPr>
-              <a:t>Poder y saber</a:t>
-            </a:r>
-          </a:p>
-        </p:txBody>
-      </p:sp>
-      <p:graphicFrame>
-        <p:nvGraphicFramePr>
-          <p:cNvPr id="4" name="Table 3"/>
-          <p:cNvGraphicFramePr>
-            <a:graphicFrameLocks noGrp="1"/>
-          </p:cNvGraphicFramePr>
+              <a:t>Cómo reconocerla</a:t>
+            </a:r>
+          </a:p>
+        </p:txBody>
+      </p:sp>
+      <p:sp>
+        <p:nvSpPr>
+          <p:cNvPr id="4" name="TextBox 3"/>
+          <p:cNvSpPr txBox="1"/>
           <p:nvPr/>
-        </p:nvGraphicFramePr>
-        <p:xfrm>
-          <a:off x="640000" y="1700000"/>
-          <a:ext cx="10912000" cy="3000000"/>
-        </p:xfrm>
-        <a:graphic>
-          <a:graphicData uri="http://schemas.openxmlformats.org/drawingml/2006/table">
-            <a:tbl>
-              <a:tblPr firstRow="1" bandRow="1">
-                <a:tableStyleId>{5C22544A-7EE6-4342-B048-85BDC9FD1C3A}</a:tableStyleId>
-              </a:tblPr>
-              <a:tblGrid>
-                <a:gridCol w="3637333"/>
-                <a:gridCol w="3637333"/>
-                <a:gridCol w="3637334"/>
-              </a:tblGrid>
-              <a:tr h="600000">
-                <a:tc>
-                  <a:txBody>
-                    <a:bodyPr/>
-                    <a:lstStyle/>
-                    <a:p>
-                      <a:r>
-                        <a:rPr sz="2000" b="1">
-                          <a:solidFill>
-                            <a:srgbClr val="FBF7EF"/>
-                          </a:solidFill>
-                          <a:latin typeface="Fredoka"/>
-                        </a:rPr>
-                        <a:t/>
-                      </a:r>
-                    </a:p>
-                  </a:txBody>
-                  <a:tcPr>
-                    <a:solidFill>
-                      <a:srgbClr val="1F2A44"/>
-                    </a:solidFill>
-                  </a:tcPr>
-                </a:tc>
-                <a:tc>
-                  <a:txBody>
-                    <a:bodyPr/>
-                    <a:lstStyle/>
-                    <a:p>
-                      <a:r>
-                        <a:rPr sz="2000" b="1">
-                          <a:solidFill>
-                            <a:srgbClr val="FBF7EF"/>
-                          </a:solidFill>
-                          <a:latin typeface="Fredoka"/>
-                        </a:rPr>
-                        <a:t>Autoridad por poder</a:t>
-                      </a:r>
-                    </a:p>
-                  </a:txBody>
-                  <a:tcPr>
-                    <a:solidFill>
-                      <a:srgbClr val="1F2A44"/>
-                    </a:solidFill>
-                  </a:tcPr>
-                </a:tc>
-                <a:tc>
-                  <a:txBody>
-                    <a:bodyPr/>
-                    <a:lstStyle/>
-                    <a:p>
-                      <a:r>
-                        <a:rPr sz="2000" b="1">
-                          <a:solidFill>
-                            <a:srgbClr val="FBF7EF"/>
-                          </a:solidFill>
-                          <a:latin typeface="Fredoka"/>
-                        </a:rPr>
-                        <a:t>Autoridad por saber</a:t>
-                      </a:r>
-                    </a:p>
-                  </a:txBody>
-                  <a:tcPr>
-                    <a:solidFill>
-                      <a:srgbClr val="1F2A44"/>
-                    </a:solidFill>
-                  </a:tcPr>
-                </a:tc>
-              </a:tr>
-              <a:tr h="600000">
-                <a:tc>
-                  <a:txBody>
-                    <a:bodyPr/>
-                    <a:lstStyle/>
-                    <a:p>
-                      <a:r>
-                        <a:rPr sz="2000" b="1">
-                          <a:solidFill>
-                            <a:srgbClr val="1F2A44"/>
-                          </a:solidFill>
-                          <a:latin typeface="Nunito Sans"/>
-                        </a:rPr>
-                        <a:t>Qué tiene</a:t>
-                      </a:r>
-                    </a:p>
-                  </a:txBody>
-                  <a:tcPr>
-                    <a:solidFill>
-                      <a:srgbClr val="FFFFFF"/>
-                    </a:solidFill>
-                  </a:tcPr>
-                </a:tc>
-                <a:tc>
-                  <a:txBody>
-                    <a:bodyPr/>
-                    <a:lstStyle/>
-                    <a:p>
-                      <a:r>
-                        <a:rPr sz="2000" b="0">
-                          <a:solidFill>
-                            <a:srgbClr val="1F2A44"/>
-                          </a:solidFill>
-                          <a:latin typeface="Nunito Sans"/>
-                        </a:rPr>
-                        <a:t>Un cargo: puede mandar</a:t>
-                      </a:r>
-                    </a:p>
-                  </a:txBody>
-                  <a:tcPr>
-                    <a:solidFill>
-                      <a:srgbClr val="FFFFFF"/>
-                    </a:solidFill>
-                  </a:tcPr>
-                </a:tc>
-                <a:tc>
-                  <a:txBody>
-                    <a:bodyPr/>
-                    <a:lstStyle/>
-                    <a:p>
-                      <a:r>
-                        <a:rPr sz="2000" b="0">
-                          <a:solidFill>
-                            <a:srgbClr val="1F2A44"/>
-                          </a:solidFill>
-                          <a:latin typeface="Nunito Sans"/>
-                        </a:rPr>
-                        <a:t>Conocimiento de un tema</a:t>
-                      </a:r>
-                    </a:p>
-                  </a:txBody>
-                  <a:tcPr>
-                    <a:solidFill>
-                      <a:srgbClr val="FFFFFF"/>
-                    </a:solidFill>
-                  </a:tcPr>
-                </a:tc>
-              </a:tr>
-              <a:tr h="600000">
-                <a:tc>
-                  <a:txBody>
-                    <a:bodyPr/>
-                    <a:lstStyle/>
-                    <a:p>
-                      <a:r>
-                        <a:rPr sz="2000" b="1">
-                          <a:solidFill>
-                            <a:srgbClr val="1F2A44"/>
-                          </a:solidFill>
-                          <a:latin typeface="Nunito Sans"/>
-                        </a:rPr>
-                        <a:t>Ejemplos</a:t>
-                      </a:r>
-                    </a:p>
-                  </a:txBody>
-                  <a:tcPr>
-                    <a:solidFill>
-                      <a:srgbClr val="EAF0F7"/>
-                    </a:solidFill>
-                  </a:tcPr>
-                </a:tc>
-                <a:tc>
-                  <a:txBody>
-                    <a:bodyPr/>
-                    <a:lstStyle/>
-                    <a:p>
-                      <a:r>
-                        <a:rPr sz="2000" b="0">
-                          <a:solidFill>
-                            <a:srgbClr val="1F2A44"/>
-                          </a:solidFill>
-                          <a:latin typeface="Nunito Sans"/>
-                        </a:rPr>
-                        <a:t>Directora, árbitro, policía</a:t>
-                      </a:r>
-                    </a:p>
-                  </a:txBody>
-                  <a:tcPr>
-                    <a:solidFill>
-                      <a:srgbClr val="EAF0F7"/>
-                    </a:solidFill>
-                  </a:tcPr>
-                </a:tc>
-                <a:tc>
-                  <a:txBody>
-                    <a:bodyPr/>
-                    <a:lstStyle/>
-                    <a:p>
-                      <a:r>
-                        <a:rPr sz="2000" b="0">
-                          <a:solidFill>
-                            <a:srgbClr val="1F2A44"/>
-                          </a:solidFill>
-                          <a:latin typeface="Nunito Sans"/>
-                        </a:rPr>
-                        <a:t>Médica, mecánico, profesor de Química</a:t>
-                      </a:r>
-                    </a:p>
-                  </a:txBody>
-                  <a:tcPr>
-                    <a:solidFill>
-                      <a:srgbClr val="EAF0F7"/>
-                    </a:solidFill>
-                  </a:tcPr>
-                </a:tc>
-              </a:tr>
-              <a:tr h="600000">
-                <a:tc>
-                  <a:txBody>
-                    <a:bodyPr/>
-                    <a:lstStyle/>
-                    <a:p>
-                      <a:r>
-                        <a:rPr sz="2000" b="1">
-                          <a:solidFill>
-                            <a:srgbClr val="1F2A44"/>
-                          </a:solidFill>
-                          <a:latin typeface="Nunito Sans"/>
-                        </a:rPr>
-                        <a:t>Qué me pide</a:t>
-                      </a:r>
-                    </a:p>
-                  </a:txBody>
-                  <a:tcPr>
-                    <a:solidFill>
-                      <a:srgbClr val="FFFFFF"/>
-                    </a:solidFill>
-                  </a:tcPr>
-                </a:tc>
-                <a:tc>
-                  <a:txBody>
-                    <a:bodyPr/>
-                    <a:lstStyle/>
-                    <a:p>
-                      <a:r>
-                        <a:rPr sz="2000" b="0">
-                          <a:solidFill>
-                            <a:srgbClr val="1F2A44"/>
-                          </a:solidFill>
-                          <a:latin typeface="Nunito Sans"/>
-                        </a:rPr>
-                        <a:t>Que obedezca</a:t>
-                      </a:r>
-                    </a:p>
-                  </a:txBody>
-                  <a:tcPr>
-                    <a:solidFill>
-                      <a:srgbClr val="FFFFFF"/>
-                    </a:solidFill>
-                  </a:tcPr>
-                </a:tc>
-                <a:tc>
-                  <a:txBody>
-                    <a:bodyPr/>
-                    <a:lstStyle/>
-                    <a:p>
-                      <a:r>
-                        <a:rPr sz="2000" b="0">
-                          <a:solidFill>
-                            <a:srgbClr val="1F2A44"/>
-                          </a:solidFill>
-                          <a:latin typeface="Nunito Sans"/>
-                        </a:rPr>
-                        <a:t>Que me crea lo que dice</a:t>
-                      </a:r>
-                    </a:p>
-                  </a:txBody>
-                  <a:tcPr>
-                    <a:solidFill>
-                      <a:srgbClr val="FFFFFF"/>
-                    </a:solidFill>
-                  </a:tcPr>
-                </a:tc>
-              </a:tr>
-              <a:tr h="600000">
-                <a:tc>
-                  <a:txBody>
-                    <a:bodyPr/>
-                    <a:lstStyle/>
-                    <a:p>
-                      <a:r>
-                        <a:rPr sz="2000" b="1">
-                          <a:solidFill>
-                            <a:srgbClr val="1F2A44"/>
-                          </a:solidFill>
-                          <a:latin typeface="Nunito Sans"/>
-                        </a:rPr>
-                        <a:t>Por qué hacer caso</a:t>
-                      </a:r>
-                    </a:p>
-                  </a:txBody>
-                  <a:tcPr>
-                    <a:solidFill>
-                      <a:srgbClr val="EAF0F7"/>
-                    </a:solidFill>
-                  </a:tcPr>
-                </a:tc>
-                <a:tc>
-                  <a:txBody>
-                    <a:bodyPr/>
-                    <a:lstStyle/>
-                    <a:p>
-                      <a:r>
-                        <a:rPr sz="2000" b="0">
-                          <a:solidFill>
-                            <a:srgbClr val="1F2A44"/>
-                          </a:solidFill>
-                          <a:latin typeface="Nunito Sans"/>
-                        </a:rPr>
-                        <a:t>Por las normas del grupo</a:t>
-                      </a:r>
-                    </a:p>
-                  </a:txBody>
-                  <a:tcPr>
-                    <a:solidFill>
-                      <a:srgbClr val="EAF0F7"/>
-                    </a:solidFill>
-                  </a:tcPr>
-                </a:tc>
-                <a:tc>
-                  <a:txBody>
-                    <a:bodyPr/>
-                    <a:lstStyle/>
-                    <a:p>
-                      <a:r>
-                        <a:rPr sz="2000" b="0">
-                          <a:solidFill>
-                            <a:srgbClr val="1F2A44"/>
-                          </a:solidFill>
-                          <a:latin typeface="Nunito Sans"/>
-                        </a:rPr>
-                        <a:t>Porque sabe y tiene pruebas</a:t>
-                      </a:r>
-                    </a:p>
-                  </a:txBody>
-                  <a:tcPr>
-                    <a:solidFill>
-                      <a:srgbClr val="EAF0F7"/>
-                    </a:solidFill>
-                  </a:tcPr>
-                </a:tc>
-              </a:tr>
-            </a:tbl>
-          </a:graphicData>
-        </a:graphic>
-      </p:graphicFrame>
+        </p:nvSpPr>
+        <p:spPr>
+          <a:xfrm>
+            <a:off x="640000" y="1650000"/>
+            <a:ext cx="10912000" cy="4808000"/>
+          </a:xfrm>
+          <a:prstGeom prst="rect">
+            <a:avLst/>
+          </a:prstGeom>
+          <a:noFill/>
+        </p:spPr>
+        <p:txBody>
+          <a:bodyPr wrap="square">
+            <a:spAutoFit/>
+          </a:bodyPr>
+          <a:lstStyle/>
+          <a:p>
+            <a:pPr>
+              <a:spcAft>
+                <a:spcPts val="1260"/>
+              </a:spcAft>
+            </a:pPr>
+            <a:r>
+              <a:rPr sz="2800" b="1">
+                <a:solidFill>
+                  <a:srgbClr val="E8793A"/>
+                </a:solidFill>
+                <a:latin typeface="Nunito Sans"/>
+              </a:rPr>
+              <a:t>• </a:t>
+            </a:r>
+            <a:r>
+              <a:rPr sz="2800" b="0">
+                <a:solidFill>
+                  <a:srgbClr val="1F2A44"/>
+                </a:solidFill>
+                <a:latin typeface="Nunito Sans"/>
+              </a:rPr>
+              <a:t>Suele usar palabras como </a:t>
+            </a:r>
+            <a:r>
+              <a:rPr sz="2800" b="1">
+                <a:solidFill>
+                  <a:srgbClr val="1F2A44"/>
+                </a:solidFill>
+                <a:latin typeface="Nunito Sans"/>
+              </a:rPr>
+              <a:t>todos</a:t>
+            </a:r>
+            <a:r>
+              <a:rPr sz="2800" b="0">
+                <a:solidFill>
+                  <a:srgbClr val="1F2A44"/>
+                </a:solidFill>
+                <a:latin typeface="Nunito Sans"/>
+              </a:rPr>
+              <a:t>, </a:t>
+            </a:r>
+            <a:r>
+              <a:rPr sz="2800" b="1">
+                <a:solidFill>
+                  <a:srgbClr val="1F2A44"/>
+                </a:solidFill>
+                <a:latin typeface="Nunito Sans"/>
+              </a:rPr>
+              <a:t>nunca</a:t>
+            </a:r>
+            <a:r>
+              <a:rPr sz="2800" b="0">
+                <a:solidFill>
+                  <a:srgbClr val="1F2A44"/>
+                </a:solidFill>
+                <a:latin typeface="Nunito Sans"/>
+              </a:rPr>
+              <a:t>, </a:t>
+            </a:r>
+            <a:r>
+              <a:rPr sz="2800" b="1">
+                <a:solidFill>
+                  <a:srgbClr val="1F2A44"/>
+                </a:solidFill>
+                <a:latin typeface="Nunito Sans"/>
+              </a:rPr>
+              <a:t>siempre</a:t>
+            </a:r>
+            <a:r>
+              <a:rPr sz="2800" b="0">
+                <a:solidFill>
+                  <a:srgbClr val="1F2A44"/>
+                </a:solidFill>
+                <a:latin typeface="Nunito Sans"/>
+              </a:rPr>
+              <a:t>, </a:t>
+            </a:r>
+            <a:r>
+              <a:rPr sz="2800" b="1">
+                <a:solidFill>
+                  <a:srgbClr val="1F2A44"/>
+                </a:solidFill>
+                <a:latin typeface="Nunito Sans"/>
+              </a:rPr>
+              <a:t>ninguno</a:t>
+            </a:r>
+          </a:p>
+          <a:p>
+            <a:pPr>
+              <a:spcAft>
+                <a:spcPts val="1260"/>
+              </a:spcAft>
+            </a:pPr>
+            <a:r>
+              <a:rPr sz="2800" b="1">
+                <a:solidFill>
+                  <a:srgbClr val="E8793A"/>
+                </a:solidFill>
+                <a:latin typeface="Nunito Sans"/>
+              </a:rPr>
+              <a:t>• </a:t>
+            </a:r>
+            <a:r>
+              <a:rPr sz="2800" b="0">
+                <a:solidFill>
+                  <a:srgbClr val="1F2A44"/>
+                </a:solidFill>
+                <a:latin typeface="Nunito Sans"/>
+              </a:rPr>
+              <a:t>La prueba es un caso, dos o «uno que conozco»</a:t>
+            </a:r>
+          </a:p>
+          <a:p>
+            <a:pPr>
+              <a:spcAft>
+                <a:spcPts val="1260"/>
+              </a:spcAft>
+            </a:pPr>
+            <a:r>
+              <a:rPr sz="2800" b="1">
+                <a:solidFill>
+                  <a:srgbClr val="E8793A"/>
+                </a:solidFill>
+                <a:latin typeface="Nunito Sans"/>
+              </a:rPr>
+              <a:t>• </a:t>
+            </a:r>
+            <a:r>
+              <a:rPr sz="2800" b="0">
+                <a:solidFill>
+                  <a:srgbClr val="1F2A44"/>
+                </a:solidFill>
+                <a:latin typeface="Nunito Sans"/>
+              </a:rPr>
+              <a:t>Muchas veces habla de un grupo entero de personas</a:t>
+            </a:r>
+          </a:p>
+          <a:p>
+            <a:pPr>
+              <a:spcAft>
+                <a:spcPts val="1260"/>
+              </a:spcAft>
+            </a:pPr>
+            <a:r>
+              <a:rPr sz="2800" b="1">
+                <a:solidFill>
+                  <a:srgbClr val="E8793A"/>
+                </a:solidFill>
+                <a:latin typeface="Nunito Sans"/>
+              </a:rPr>
+              <a:t>• </a:t>
+            </a:r>
+            <a:r>
+              <a:rPr sz="2800" b="0">
+                <a:solidFill>
+                  <a:srgbClr val="1F2A44"/>
+                </a:solidFill>
+                <a:latin typeface="Nunito Sans"/>
+              </a:rPr>
+              <a:t>Así nacen muchos </a:t>
+            </a:r>
+            <a:r>
+              <a:rPr sz="2800" b="1">
+                <a:solidFill>
+                  <a:srgbClr val="1F2A44"/>
+                </a:solidFill>
+                <a:latin typeface="Nunito Sans"/>
+              </a:rPr>
+              <a:t>estereotipos</a:t>
+            </a:r>
+            <a:r>
+              <a:rPr sz="2800" b="0">
+                <a:solidFill>
+                  <a:srgbClr val="1F2A44"/>
+                </a:solidFill>
+                <a:latin typeface="Nunito Sans"/>
+              </a:rPr>
+              <a:t>: ideas fijas sobre un grupo</a:t>
+            </a:r>
+          </a:p>
+        </p:txBody>
+      </p:sp>
     </p:spTree>
   </p:cSld>
   <p:clrMapOvr>
@@ -7433,7 +7858,7 @@
                 </a:solidFill>
                 <a:latin typeface="Nunito Sans"/>
               </a:rPr>
-              <a:t>BLOQUE 1 · DOS TIPOS DE AUTORIDAD</a:t>
+              <a:t>BLOQUE 1 · DE UN CASO A «TODOS»</a:t>
             </a:r>
           </a:p>
         </p:txBody>
@@ -7472,134 +7897,221 @@
                 </a:solidFill>
                 <a:latin typeface="Fredoka"/>
               </a:rPr>
-              <a:t>Cuidado: tener poder no es tener razón</a:t>
-            </a:r>
-          </a:p>
-        </p:txBody>
-      </p:sp>
-      <p:sp>
-        <p:nvSpPr>
-          <p:cNvPr id="4" name="TextBox 3"/>
-          <p:cNvSpPr txBox="1"/>
+              <a:t>De pocos casos a «todos»</a:t>
+            </a:r>
+          </a:p>
+        </p:txBody>
+      </p:sp>
+      <p:graphicFrame>
+        <p:nvGraphicFramePr>
+          <p:cNvPr id="4" name="Table 3"/>
+          <p:cNvGraphicFramePr>
+            <a:graphicFrameLocks noGrp="1"/>
+          </p:cNvGraphicFramePr>
           <p:nvPr/>
-        </p:nvSpPr>
-        <p:spPr>
-          <a:xfrm>
-            <a:off x="640000" y="1650000"/>
-            <a:ext cx="10912000" cy="4808000"/>
-          </a:xfrm>
-          <a:prstGeom prst="rect">
-            <a:avLst/>
-          </a:prstGeom>
-          <a:noFill/>
-        </p:spPr>
-        <p:txBody>
-          <a:bodyPr wrap="square">
-            <a:spAutoFit/>
-          </a:bodyPr>
-          <a:lstStyle/>
-          <a:p>
-            <a:pPr>
-              <a:spcAft>
-                <a:spcPts val="1260"/>
-              </a:spcAft>
-            </a:pPr>
-            <a:r>
-              <a:rPr sz="2800" b="1">
-                <a:solidFill>
-                  <a:srgbClr val="E8793A"/>
-                </a:solidFill>
-                <a:latin typeface="Nunito Sans"/>
-              </a:rPr>
-              <a:t>• </a:t>
-            </a:r>
-            <a:r>
-              <a:rPr sz="2800" b="0">
-                <a:solidFill>
-                  <a:srgbClr val="1F2A44"/>
-                </a:solidFill>
-                <a:latin typeface="Nunito Sans"/>
-              </a:rPr>
-              <a:t>El árbitro manda en el partido, pero puede equivocarse</a:t>
-            </a:r>
-          </a:p>
-          <a:p>
-            <a:pPr>
-              <a:spcAft>
-                <a:spcPts val="1260"/>
-              </a:spcAft>
-            </a:pPr>
-            <a:r>
-              <a:rPr sz="2800" b="1">
-                <a:solidFill>
-                  <a:srgbClr val="E8793A"/>
-                </a:solidFill>
-                <a:latin typeface="Nunito Sans"/>
-              </a:rPr>
-              <a:t>• </a:t>
-            </a:r>
-            <a:r>
-              <a:rPr sz="2800" b="0">
-                <a:solidFill>
-                  <a:srgbClr val="1F2A44"/>
-                </a:solidFill>
-                <a:latin typeface="Nunito Sans"/>
-              </a:rPr>
-              <a:t>Obedecer no significa que quien manda tenga razón</a:t>
-            </a:r>
-          </a:p>
-          <a:p>
-            <a:pPr>
-              <a:spcAft>
-                <a:spcPts val="1260"/>
-              </a:spcAft>
-            </a:pPr>
-            <a:r>
-              <a:rPr sz="2800" b="1">
-                <a:solidFill>
-                  <a:srgbClr val="E8793A"/>
-                </a:solidFill>
-                <a:latin typeface="Nunito Sans"/>
-              </a:rPr>
-              <a:t>• </a:t>
-            </a:r>
-            <a:r>
-              <a:rPr sz="2800" b="0">
-                <a:solidFill>
-                  <a:srgbClr val="1F2A44"/>
-                </a:solidFill>
-                <a:latin typeface="Nunito Sans"/>
-              </a:rPr>
-              <a:t>Nadie sabe de todo por ser jefe</a:t>
-            </a:r>
-          </a:p>
-          <a:p>
-            <a:pPr>
-              <a:spcAft>
-                <a:spcPts val="1260"/>
-              </a:spcAft>
-            </a:pPr>
-            <a:r>
-              <a:rPr sz="2800" b="1">
-                <a:solidFill>
-                  <a:srgbClr val="E8793A"/>
-                </a:solidFill>
-                <a:latin typeface="Nunito Sans"/>
-              </a:rPr>
-              <a:t>• </a:t>
-            </a:r>
-            <a:r>
-              <a:rPr sz="2800" b="0">
-                <a:solidFill>
-                  <a:srgbClr val="1F2A44"/>
-                </a:solidFill>
-                <a:latin typeface="Nunito Sans"/>
-              </a:rPr>
-              <a:t>Por su saber, un experto no puede mandarte: solo darte razones</a:t>
-            </a:r>
-          </a:p>
-        </p:txBody>
-      </p:sp>
+        </p:nvGraphicFramePr>
+        <p:xfrm>
+          <a:off x="640000" y="1700000"/>
+          <a:ext cx="10912000" cy="2400000"/>
+        </p:xfrm>
+        <a:graphic>
+          <a:graphicData uri="http://schemas.openxmlformats.org/drawingml/2006/table">
+            <a:tbl>
+              <a:tblPr firstRow="1" bandRow="1">
+                <a:tableStyleId>{5C22544A-7EE6-4342-B048-85BDC9FD1C3A}</a:tableStyleId>
+              </a:tblPr>
+              <a:tblGrid>
+                <a:gridCol w="5456000"/>
+                <a:gridCol w="5456000"/>
+              </a:tblGrid>
+              <a:tr h="600000">
+                <a:tc>
+                  <a:txBody>
+                    <a:bodyPr/>
+                    <a:lstStyle/>
+                    <a:p>
+                      <a:r>
+                        <a:rPr sz="2000" b="1">
+                          <a:solidFill>
+                            <a:srgbClr val="FBF7EF"/>
+                          </a:solidFill>
+                          <a:latin typeface="Fredoka"/>
+                        </a:rPr>
+                        <a:t>Casos</a:t>
+                      </a:r>
+                    </a:p>
+                  </a:txBody>
+                  <a:tcPr>
+                    <a:solidFill>
+                      <a:srgbClr val="1F2A44"/>
+                    </a:solidFill>
+                  </a:tcPr>
+                </a:tc>
+                <a:tc>
+                  <a:txBody>
+                    <a:bodyPr/>
+                    <a:lstStyle/>
+                    <a:p>
+                      <a:r>
+                        <a:rPr sz="2000" b="1">
+                          <a:solidFill>
+                            <a:srgbClr val="FBF7EF"/>
+                          </a:solidFill>
+                          <a:latin typeface="Fredoka"/>
+                        </a:rPr>
+                        <a:t>Conclusión apresurada</a:t>
+                      </a:r>
+                    </a:p>
+                  </a:txBody>
+                  <a:tcPr>
+                    <a:solidFill>
+                      <a:srgbClr val="1F2A44"/>
+                    </a:solidFill>
+                  </a:tcPr>
+                </a:tc>
+              </a:tr>
+              <a:tr h="600000">
+                <a:tc>
+                  <a:txBody>
+                    <a:bodyPr/>
+                    <a:lstStyle/>
+                    <a:p>
+                      <a:r>
+                        <a:rPr sz="2000" b="0">
+                          <a:solidFill>
+                            <a:srgbClr val="1F2A44"/>
+                          </a:solidFill>
+                          <a:latin typeface="Nunito Sans"/>
+                        </a:rPr>
+                        <a:t>Dos chicos de otra clase se copian</a:t>
+                      </a:r>
+                    </a:p>
+                  </a:txBody>
+                  <a:tcPr>
+                    <a:solidFill>
+                      <a:srgbClr val="FFFFFF"/>
+                    </a:solidFill>
+                  </a:tcPr>
+                </a:tc>
+                <a:tc>
+                  <a:txBody>
+                    <a:bodyPr/>
+                    <a:lstStyle/>
+                    <a:p>
+                      <a:r>
+                        <a:rPr sz="2000" b="0">
+                          <a:solidFill>
+                            <a:srgbClr val="1F2A44"/>
+                          </a:solidFill>
+                          <a:latin typeface="Nunito Sans"/>
+                        </a:rPr>
+                        <a:t>«En esa clase son todos unos copiones»</a:t>
+                      </a:r>
+                    </a:p>
+                  </a:txBody>
+                  <a:tcPr>
+                    <a:solidFill>
+                      <a:srgbClr val="FFFFFF"/>
+                    </a:solidFill>
+                  </a:tcPr>
+                </a:tc>
+              </a:tr>
+              <a:tr h="600000">
+                <a:tc>
+                  <a:txBody>
+                    <a:bodyPr/>
+                    <a:lstStyle/>
+                    <a:p>
+                      <a:r>
+                        <a:rPr sz="2000" b="0">
+                          <a:solidFill>
+                            <a:srgbClr val="1F2A44"/>
+                          </a:solidFill>
+                          <a:latin typeface="Nunito Sans"/>
+                        </a:rPr>
+                        <a:t>Un videojuego de una marca me aburrió</a:t>
+                      </a:r>
+                    </a:p>
+                  </a:txBody>
+                  <a:tcPr>
+                    <a:solidFill>
+                      <a:srgbClr val="EAF0F7"/>
+                    </a:solidFill>
+                  </a:tcPr>
+                </a:tc>
+                <a:tc>
+                  <a:txBody>
+                    <a:bodyPr/>
+                    <a:lstStyle/>
+                    <a:p>
+                      <a:r>
+                        <a:rPr sz="2000" b="0">
+                          <a:solidFill>
+                            <a:srgbClr val="1F2A44"/>
+                          </a:solidFill>
+                          <a:latin typeface="Nunito Sans"/>
+                        </a:rPr>
+                        <a:t>«Los juegos de esa marca son malos»</a:t>
+                      </a:r>
+                    </a:p>
+                  </a:txBody>
+                  <a:tcPr>
+                    <a:solidFill>
+                      <a:srgbClr val="EAF0F7"/>
+                    </a:solidFill>
+                  </a:tcPr>
+                </a:tc>
+              </a:tr>
+              <a:tr h="600000">
+                <a:tc>
+                  <a:txBody>
+                    <a:bodyPr/>
+                    <a:lstStyle/>
+                    <a:p>
+                      <a:r>
+                        <a:rPr sz="2000" b="0">
+                          <a:solidFill>
+                            <a:srgbClr val="1F2A44"/>
+                          </a:solidFill>
+                          <a:latin typeface="Nunito Sans"/>
+                        </a:rPr>
+                        <a:t>Un día el metro llegó tarde</a:t>
+                      </a:r>
+                    </a:p>
+                  </a:txBody>
+                  <a:tcPr>
+                    <a:solidFill>
+                      <a:srgbClr val="FFFFFF"/>
+                    </a:solidFill>
+                  </a:tcPr>
+                </a:tc>
+                <a:tc>
+                  <a:txBody>
+                    <a:bodyPr/>
+                    <a:lstStyle/>
+                    <a:p>
+                      <a:r>
+                        <a:rPr sz="2000" b="0">
+                          <a:solidFill>
+                            <a:srgbClr val="1F2A44"/>
+                          </a:solidFill>
+                          <a:latin typeface="Nunito Sans"/>
+                        </a:rPr>
+                        <a:t>«El metro nunca es puntual»</a:t>
+                      </a:r>
+                    </a:p>
+                  </a:txBody>
+                  <a:tcPr>
+                    <a:solidFill>
+                      <a:srgbClr val="FFFFFF"/>
+                    </a:solidFill>
+                  </a:tcPr>
+                </a:tc>
+              </a:tr>
+            </a:tbl>
+          </a:graphicData>
+        </a:graphic>
+      </p:graphicFrame>
     </p:spTree>
   </p:cSld>
   <p:clrMapOvr>
